--- a/courseware/202609_ADS_W05_October_Exam_Review.pptx
+++ b/courseware/202609_ADS_W05_October_Exam_Review.pptx
@@ -29,6 +29,10 @@
     <p:sldId id="277" r:id="rId28"/>
     <p:sldId id="278" r:id="rId29"/>
     <p:sldId id="279" r:id="rId30"/>
+    <p:sldId id="280" r:id="rId31"/>
+    <p:sldId id="281" r:id="rId32"/>
+    <p:sldId id="282" r:id="rId33"/>
+    <p:sldId id="283" r:id="rId34"/>
   </p:sldIdLst>
   <p:sldSz cx="12191695" cy="6858000" type="screen4x3"/>
   <p:notesSz cx="6858000" cy="9144000"/>
@@ -3257,7 +3261,7 @@
                 <a:latin typeface="Segoe UI"/>
                 <a:ea typeface="微软雅黑"/>
               </a:rPr>
-              <a:t>知识清单自检 · 月考样卷 5 题 · 考后订正方法 · 考场策略</a:t>
+              <a:t>知识清单自检 · 月考样卷 6 题 · 考后订正方法 · 考场策略</a:t>
             </a:r>
           </a:p>
         </p:txBody>
@@ -3381,7 +3385,7 @@
                 <a:latin typeface="Segoe UI"/>
                 <a:ea typeface="微软雅黑"/>
               </a:rPr>
-              <a:t>T1 成绩转换（15 分）</a:t>
+              <a:t>难度梯度</a:t>
             </a:r>
           </a:p>
         </p:txBody>
@@ -3438,8 +3442,8 @@
         </p:nvSpPr>
         <p:spPr>
           <a:xfrm>
-            <a:off x="566928" y="1298448"/>
-            <a:ext cx="11057839" cy="4864608"/>
+            <a:off x="566928" y="2748407"/>
+            <a:ext cx="11057839" cy="1964690"/>
           </a:xfrm>
           <a:prstGeom prst="rect">
             <a:avLst/>
@@ -3454,200 +3458,162 @@
           <a:p>
             <a:pPr algn="l">
               <a:lnSpc>
-                <a:spcPct val="132000"/>
+                <a:spcPts val="2210"/>
               </a:lnSpc>
               <a:spcBef>
                 <a:spcPts val="0"/>
               </a:spcBef>
               <a:spcAft>
-                <a:spcPts val="1240"/>
-              </a:spcAft>
-            </a:pPr>
-            <a:r>
-              <a:rPr sz="2000" b="0" i="0">
-                <a:solidFill>
-                  <a:srgbClr val="242A33"/>
-                </a:solidFill>
-                <a:latin typeface="Segoe UI"/>
-                <a:ea typeface="微软雅黑"/>
-              </a:rPr>
-              <a:t>•  </a:t>
-            </a:r>
-            <a:r>
-              <a:rPr sz="2000" b="1" i="0">
+                <a:spcPts val="0"/>
+              </a:spcAft>
+            </a:pPr>
+            <a:r>
+              <a:rPr sz="1700" b="0" i="0">
                 <a:solidFill>
                   <a:srgbClr val="12395B"/>
-                </a:solidFill>
-                <a:latin typeface="Segoe UI"/>
-                <a:ea typeface="微软雅黑"/>
-              </a:rPr>
-              <a:t>考点</a:t>
-            </a:r>
-            <a:r>
-              <a:rPr sz="2000" b="0" i="0">
-                <a:solidFill>
-                  <a:srgbClr val="242A33"/>
-                </a:solidFill>
-                <a:latin typeface="Segoe UI"/>
-                <a:ea typeface="微软雅黑"/>
-              </a:rPr>
-              <a:t>：输入输出、分支、格式化（W1、W2）　</a:t>
-            </a:r>
-            <a:r>
-              <a:rPr sz="2000" b="1" i="0">
-                <a:solidFill>
-                  <a:srgbClr val="12395B"/>
-                </a:solidFill>
-                <a:latin typeface="Segoe UI"/>
-                <a:ea typeface="微软雅黑"/>
-              </a:rPr>
-              <a:t>难度</a:t>
-            </a:r>
-            <a:r>
-              <a:rPr sz="2000" b="0" i="0">
-                <a:solidFill>
-                  <a:srgbClr val="242A33"/>
-                </a:solidFill>
-                <a:latin typeface="Segoe UI"/>
-                <a:ea typeface="微软雅黑"/>
-              </a:rPr>
-              <a:t>：★☆☆☆☆</a:t>
-            </a:r>
-          </a:p>
-          <a:p>
-            <a:pPr algn="l">
-              <a:lnSpc>
-                <a:spcPct val="132000"/>
-              </a:lnSpc>
-              <a:spcBef>
-                <a:spcPts val="0"/>
-              </a:spcBef>
-              <a:spcAft>
-                <a:spcPts val="1240"/>
-              </a:spcAft>
-            </a:pPr>
-            <a:r>
-              <a:rPr sz="2000" b="0" i="0">
-                <a:solidFill>
-                  <a:srgbClr val="242A33"/>
-                </a:solidFill>
-                <a:latin typeface="Segoe UI"/>
-                <a:ea typeface="微软雅黑"/>
-              </a:rPr>
-              <a:t>•  读入 n 个百分制成绩，输出等级 A/B/C/D/E；最后输出通过率，保留两位小数</a:t>
-            </a:r>
-          </a:p>
-          <a:p>
-            <a:pPr algn="l">
-              <a:lnSpc>
-                <a:spcPct val="132000"/>
-              </a:lnSpc>
-              <a:spcBef>
-                <a:spcPts val="0"/>
-              </a:spcBef>
-              <a:spcAft>
-                <a:spcPts val="1240"/>
-              </a:spcAft>
-            </a:pPr>
-            <a:r>
-              <a:rPr sz="2000" b="0" i="0">
-                <a:solidFill>
-                  <a:srgbClr val="242A33"/>
-                </a:solidFill>
-                <a:latin typeface="Segoe UI"/>
-                <a:ea typeface="微软雅黑"/>
-              </a:rPr>
-              <a:t>•  </a:t>
-            </a:r>
-            <a:r>
-              <a:rPr sz="2000" b="1" i="0">
-                <a:solidFill>
-                  <a:srgbClr val="12395B"/>
-                </a:solidFill>
-                <a:latin typeface="Segoe UI"/>
-                <a:ea typeface="微软雅黑"/>
-              </a:rPr>
-              <a:t>常见失分</a:t>
-            </a:r>
-            <a:r>
-              <a:rPr sz="2000" b="0" i="0">
-                <a:solidFill>
-                  <a:srgbClr val="242A33"/>
-                </a:solidFill>
-                <a:latin typeface="Segoe UI"/>
-                <a:ea typeface="微软雅黑"/>
-              </a:rPr>
-              <a:t>：用 </a:t>
-            </a:r>
-            <a:r>
-              <a:rPr sz="1879" b="0" i="0">
-                <a:solidFill>
-                  <a:srgbClr val="242A33"/>
                 </a:solidFill>
                 <a:latin typeface="Consolas"/>
                 <a:ea typeface="Consolas"/>
               </a:rPr>
-              <a:t>round()</a:t>
-            </a:r>
-            <a:r>
-              <a:rPr sz="2000" b="0" i="0">
-                <a:solidFill>
-                  <a:srgbClr val="242A33"/>
-                </a:solidFill>
-                <a:latin typeface="Segoe UI"/>
-                <a:ea typeface="微软雅黑"/>
-              </a:rPr>
-              <a:t> 导致 </a:t>
-            </a:r>
-            <a:r>
-              <a:rPr sz="1879" b="0" i="0">
-                <a:solidFill>
-                  <a:srgbClr val="242A33"/>
+              <a:t> </a:t>
+            </a:r>
+          </a:p>
+          <a:p>
+            <a:pPr algn="l">
+              <a:lnSpc>
+                <a:spcPts val="2210"/>
+              </a:lnSpc>
+              <a:spcBef>
+                <a:spcPts val="0"/>
+              </a:spcBef>
+              <a:spcAft>
+                <a:spcPts val="0"/>
+              </a:spcAft>
+            </a:pPr>
+            <a:r>
+              <a:rPr sz="1700" b="0" i="0">
+                <a:solidFill>
+                  <a:srgbClr val="12395B"/>
                 </a:solidFill>
                 <a:latin typeface="Consolas"/>
                 <a:ea typeface="Consolas"/>
               </a:rPr>
-              <a:t>80.0</a:t>
-            </a:r>
-            <a:r>
-              <a:rPr sz="2000" b="0" i="0">
-                <a:solidFill>
-                  <a:srgbClr val="242A33"/>
-                </a:solidFill>
-                <a:latin typeface="Segoe UI"/>
-                <a:ea typeface="微软雅黑"/>
-              </a:rPr>
-              <a:t>；边界 90/80/70/60 用了 </a:t>
-            </a:r>
-            <a:r>
-              <a:rPr sz="1879" b="0" i="0">
-                <a:solidFill>
-                  <a:srgbClr val="242A33"/>
+              <a:t>   T1  15分  *          签到：读入与格式化输出        -- 95% 应 AC</a:t>
+            </a:r>
+          </a:p>
+          <a:p>
+            <a:pPr algn="l">
+              <a:lnSpc>
+                <a:spcPts val="2210"/>
+              </a:lnSpc>
+              <a:spcBef>
+                <a:spcPts val="0"/>
+              </a:spcBef>
+              <a:spcAft>
+                <a:spcPts val="0"/>
+              </a:spcAft>
+            </a:pPr>
+            <a:r>
+              <a:rPr sz="1700" b="0" i="0">
+                <a:solidFill>
+                  <a:srgbClr val="12395B"/>
                 </a:solidFill>
                 <a:latin typeface="Consolas"/>
                 <a:ea typeface="Consolas"/>
               </a:rPr>
-              <a:t>&gt;</a:t>
-            </a:r>
-            <a:r>
-              <a:rPr sz="2000" b="0" i="0">
-                <a:solidFill>
-                  <a:srgbClr val="242A33"/>
-                </a:solidFill>
-                <a:latin typeface="Segoe UI"/>
-                <a:ea typeface="微软雅黑"/>
-              </a:rPr>
-              <a:t> 而非 </a:t>
-            </a:r>
-            <a:r>
-              <a:rPr sz="1879" b="0" i="0">
-                <a:solidFill>
-                  <a:srgbClr val="242A33"/>
+              <a:t>   T2  15分  **         字符串处理                    -- 75% AC</a:t>
+            </a:r>
+          </a:p>
+          <a:p>
+            <a:pPr algn="l">
+              <a:lnSpc>
+                <a:spcPts val="2210"/>
+              </a:lnSpc>
+              <a:spcBef>
+                <a:spcPts val="0"/>
+              </a:spcBef>
+              <a:spcAft>
+                <a:spcPts val="0"/>
+              </a:spcAft>
+            </a:pPr>
+            <a:r>
+              <a:rPr sz="1700" b="0" i="0">
+                <a:solidFill>
+                  <a:srgbClr val="12395B"/>
                 </a:solidFill>
                 <a:latin typeface="Consolas"/>
                 <a:ea typeface="Consolas"/>
               </a:rPr>
-              <a:t>&gt;=</a:t>
+              <a:t>   T3  15分  ***        字典 / 排序 + 多关键字         -- 55% AC</a:t>
+            </a:r>
+          </a:p>
+          <a:p>
+            <a:pPr algn="l">
+              <a:lnSpc>
+                <a:spcPts val="2210"/>
+              </a:lnSpc>
+              <a:spcBef>
+                <a:spcPts val="0"/>
+              </a:spcBef>
+              <a:spcAft>
+                <a:spcPts val="0"/>
+              </a:spcAft>
+            </a:pPr>
+            <a:r>
+              <a:rPr sz="1700" b="0" i="0">
+                <a:solidFill>
+                  <a:srgbClr val="12395B"/>
+                </a:solidFill>
+                <a:latin typeface="Consolas"/>
+                <a:ea typeface="Consolas"/>
+              </a:rPr>
+              <a:t>   T4  15分  ***        复杂度意识：必须用筛或前缀和   -- 45% AC</a:t>
+            </a:r>
+          </a:p>
+          <a:p>
+            <a:pPr algn="l">
+              <a:lnSpc>
+                <a:spcPts val="2210"/>
+              </a:lnSpc>
+              <a:spcBef>
+                <a:spcPts val="0"/>
+              </a:spcBef>
+              <a:spcAft>
+                <a:spcPts val="0"/>
+              </a:spcAft>
+            </a:pPr>
+            <a:r>
+              <a:rPr sz="1700" b="0" i="0">
+                <a:solidFill>
+                  <a:srgbClr val="12395B"/>
+                </a:solidFill>
+                <a:latin typeface="Consolas"/>
+                <a:ea typeface="Consolas"/>
+              </a:rPr>
+              <a:t>   T5  20分  ****       综合模拟，边界多              -- 25% AC</a:t>
+            </a:r>
+          </a:p>
+          <a:p>
+            <a:pPr algn="l">
+              <a:lnSpc>
+                <a:spcPts val="2210"/>
+              </a:lnSpc>
+              <a:spcBef>
+                <a:spcPts val="0"/>
+              </a:spcBef>
+              <a:spcAft>
+                <a:spcPts val="0"/>
+              </a:spcAft>
+            </a:pPr>
+            <a:r>
+              <a:rPr sz="1700" b="0" i="0">
+                <a:solidFill>
+                  <a:srgbClr val="12395B"/>
+                </a:solidFill>
+                <a:latin typeface="Consolas"/>
+                <a:ea typeface="Consolas"/>
+              </a:rPr>
+              <a:t>   T6  20分  ****       补码 / 位运算，符号边界密集   -- 20% AC</a:t>
             </a:r>
           </a:p>
         </p:txBody>
@@ -3747,6 +3713,419 @@
 </file>
 
 <file path=ppt/slides/slide11.xml><?xml version="1.0" encoding="utf-8"?>
+<p:sld xmlns:a="http://schemas.openxmlformats.org/drawingml/2006/main" xmlns:p="http://schemas.openxmlformats.org/presentationml/2006/main" xmlns:r="http://schemas.openxmlformats.org/officeDocument/2006/relationships">
+  <p:cSld>
+    <p:spTree>
+      <p:nvGrpSpPr>
+        <p:cNvPr id="1" name=""/>
+        <p:cNvGrpSpPr/>
+        <p:nvPr/>
+      </p:nvGrpSpPr>
+      <p:grpSpPr/>
+      <p:sp>
+        <p:nvSpPr>
+          <p:cNvPr id="2" name="TextBox 1"/>
+          <p:cNvSpPr txBox="1"/>
+          <p:nvPr/>
+        </p:nvSpPr>
+        <p:spPr>
+          <a:xfrm>
+            <a:off x="566928" y="420624"/>
+            <a:ext cx="11057839" cy="548640"/>
+          </a:xfrm>
+          <a:prstGeom prst="rect">
+            <a:avLst/>
+          </a:prstGeom>
+          <a:noFill/>
+        </p:spPr>
+        <p:txBody>
+          <a:bodyPr wrap="square" lIns="0" rIns="0" tIns="0" bIns="0">
+            <a:noAutofit/>
+          </a:bodyPr>
+          <a:lstStyle/>
+          <a:p>
+            <a:pPr algn="l">
+              <a:spcBef>
+                <a:spcPts val="0"/>
+              </a:spcBef>
+              <a:spcAft>
+                <a:spcPts val="0"/>
+              </a:spcAft>
+            </a:pPr>
+            <a:r>
+              <a:rPr sz="2600" b="1" i="0">
+                <a:solidFill>
+                  <a:srgbClr val="12395B"/>
+                </a:solidFill>
+                <a:latin typeface="Segoe UI"/>
+                <a:ea typeface="微软雅黑"/>
+              </a:rPr>
+              <a:t>T1 成绩转换（15 分）</a:t>
+            </a:r>
+          </a:p>
+        </p:txBody>
+      </p:sp>
+      <p:sp>
+        <p:nvSpPr>
+          <p:cNvPr id="3" name="Rectangle 2"/>
+          <p:cNvSpPr/>
+          <p:nvPr/>
+        </p:nvSpPr>
+        <p:spPr>
+          <a:xfrm>
+            <a:off x="566928" y="1060704"/>
+            <a:ext cx="960120" cy="40640"/>
+          </a:xfrm>
+          <a:prstGeom prst="rect">
+            <a:avLst/>
+          </a:prstGeom>
+          <a:solidFill>
+            <a:srgbClr val="E07B39"/>
+          </a:solidFill>
+          <a:ln>
+            <a:noFill/>
+          </a:ln>
+          <a:effectLst/>
+        </p:spPr>
+        <p:style>
+          <a:lnRef idx="1">
+            <a:schemeClr val="accent1"/>
+          </a:lnRef>
+          <a:fillRef idx="3">
+            <a:schemeClr val="accent1"/>
+          </a:fillRef>
+          <a:effectRef idx="2">
+            <a:schemeClr val="accent1"/>
+          </a:effectRef>
+          <a:fontRef idx="minor">
+            <a:schemeClr val="lt1"/>
+          </a:fontRef>
+        </p:style>
+        <p:txBody>
+          <a:bodyPr rtlCol="0" anchor="ctr"/>
+          <a:lstStyle/>
+          <a:p>
+            <a:pPr algn="ctr"/>
+          </a:p>
+        </p:txBody>
+      </p:sp>
+      <p:sp>
+        <p:nvSpPr>
+          <p:cNvPr id="4" name="TextBox 3"/>
+          <p:cNvSpPr txBox="1"/>
+          <p:nvPr/>
+        </p:nvSpPr>
+        <p:spPr>
+          <a:xfrm>
+            <a:off x="566928" y="1298448"/>
+            <a:ext cx="11057839" cy="4864608"/>
+          </a:xfrm>
+          <a:prstGeom prst="rect">
+            <a:avLst/>
+          </a:prstGeom>
+          <a:noFill/>
+        </p:spPr>
+        <p:txBody>
+          <a:bodyPr wrap="square" lIns="0" rIns="0" tIns="0" bIns="0">
+            <a:noAutofit/>
+          </a:bodyPr>
+          <a:lstStyle/>
+          <a:p>
+            <a:pPr algn="l">
+              <a:lnSpc>
+                <a:spcPct val="132000"/>
+              </a:lnSpc>
+              <a:spcBef>
+                <a:spcPts val="0"/>
+              </a:spcBef>
+              <a:spcAft>
+                <a:spcPts val="1240"/>
+              </a:spcAft>
+            </a:pPr>
+            <a:r>
+              <a:rPr sz="2000" b="0" i="0">
+                <a:solidFill>
+                  <a:srgbClr val="242A33"/>
+                </a:solidFill>
+                <a:latin typeface="Segoe UI"/>
+                <a:ea typeface="微软雅黑"/>
+              </a:rPr>
+              <a:t>•  </a:t>
+            </a:r>
+            <a:r>
+              <a:rPr sz="2000" b="1" i="0">
+                <a:solidFill>
+                  <a:srgbClr val="12395B"/>
+                </a:solidFill>
+                <a:latin typeface="Segoe UI"/>
+                <a:ea typeface="微软雅黑"/>
+              </a:rPr>
+              <a:t>考点</a:t>
+            </a:r>
+            <a:r>
+              <a:rPr sz="2000" b="0" i="0">
+                <a:solidFill>
+                  <a:srgbClr val="242A33"/>
+                </a:solidFill>
+                <a:latin typeface="Segoe UI"/>
+                <a:ea typeface="微软雅黑"/>
+              </a:rPr>
+              <a:t>：输入输出、分支、格式化（W1、W2）　</a:t>
+            </a:r>
+            <a:r>
+              <a:rPr sz="2000" b="1" i="0">
+                <a:solidFill>
+                  <a:srgbClr val="12395B"/>
+                </a:solidFill>
+                <a:latin typeface="Segoe UI"/>
+                <a:ea typeface="微软雅黑"/>
+              </a:rPr>
+              <a:t>难度</a:t>
+            </a:r>
+            <a:r>
+              <a:rPr sz="2000" b="0" i="0">
+                <a:solidFill>
+                  <a:srgbClr val="242A33"/>
+                </a:solidFill>
+                <a:latin typeface="Segoe UI"/>
+                <a:ea typeface="微软雅黑"/>
+              </a:rPr>
+              <a:t>：★☆☆☆☆</a:t>
+            </a:r>
+          </a:p>
+          <a:p>
+            <a:pPr algn="l">
+              <a:lnSpc>
+                <a:spcPct val="132000"/>
+              </a:lnSpc>
+              <a:spcBef>
+                <a:spcPts val="0"/>
+              </a:spcBef>
+              <a:spcAft>
+                <a:spcPts val="1240"/>
+              </a:spcAft>
+            </a:pPr>
+            <a:r>
+              <a:rPr sz="2000" b="0" i="0">
+                <a:solidFill>
+                  <a:srgbClr val="242A33"/>
+                </a:solidFill>
+                <a:latin typeface="Segoe UI"/>
+                <a:ea typeface="微软雅黑"/>
+              </a:rPr>
+              <a:t>•  读入 n 个百分制成绩，输出等级 A/B/C/D/E；最后输出通过率，保留两位小数</a:t>
+            </a:r>
+          </a:p>
+          <a:p>
+            <a:pPr algn="l">
+              <a:lnSpc>
+                <a:spcPct val="132000"/>
+              </a:lnSpc>
+              <a:spcBef>
+                <a:spcPts val="0"/>
+              </a:spcBef>
+              <a:spcAft>
+                <a:spcPts val="1240"/>
+              </a:spcAft>
+            </a:pPr>
+            <a:r>
+              <a:rPr sz="2000" b="0" i="0">
+                <a:solidFill>
+                  <a:srgbClr val="242A33"/>
+                </a:solidFill>
+                <a:latin typeface="Segoe UI"/>
+                <a:ea typeface="微软雅黑"/>
+              </a:rPr>
+              <a:t>•  </a:t>
+            </a:r>
+            <a:r>
+              <a:rPr sz="2000" b="1" i="0">
+                <a:solidFill>
+                  <a:srgbClr val="12395B"/>
+                </a:solidFill>
+                <a:latin typeface="Segoe UI"/>
+                <a:ea typeface="微软雅黑"/>
+              </a:rPr>
+              <a:t>常见失分</a:t>
+            </a:r>
+            <a:r>
+              <a:rPr sz="2000" b="0" i="0">
+                <a:solidFill>
+                  <a:srgbClr val="242A33"/>
+                </a:solidFill>
+                <a:latin typeface="Segoe UI"/>
+                <a:ea typeface="微软雅黑"/>
+              </a:rPr>
+              <a:t>：用 </a:t>
+            </a:r>
+            <a:r>
+              <a:rPr sz="1879" b="0" i="0">
+                <a:solidFill>
+                  <a:srgbClr val="242A33"/>
+                </a:solidFill>
+                <a:latin typeface="Consolas"/>
+                <a:ea typeface="Consolas"/>
+              </a:rPr>
+              <a:t>round()</a:t>
+            </a:r>
+            <a:r>
+              <a:rPr sz="2000" b="0" i="0">
+                <a:solidFill>
+                  <a:srgbClr val="242A33"/>
+                </a:solidFill>
+                <a:latin typeface="Segoe UI"/>
+                <a:ea typeface="微软雅黑"/>
+              </a:rPr>
+              <a:t> 导致 </a:t>
+            </a:r>
+            <a:r>
+              <a:rPr sz="1879" b="0" i="0">
+                <a:solidFill>
+                  <a:srgbClr val="242A33"/>
+                </a:solidFill>
+                <a:latin typeface="Consolas"/>
+                <a:ea typeface="Consolas"/>
+              </a:rPr>
+              <a:t>80.0</a:t>
+            </a:r>
+            <a:r>
+              <a:rPr sz="2000" b="0" i="0">
+                <a:solidFill>
+                  <a:srgbClr val="242A33"/>
+                </a:solidFill>
+                <a:latin typeface="Segoe UI"/>
+                <a:ea typeface="微软雅黑"/>
+              </a:rPr>
+              <a:t>；边界 90/80/70/60 用了 </a:t>
+            </a:r>
+            <a:r>
+              <a:rPr sz="1879" b="0" i="0">
+                <a:solidFill>
+                  <a:srgbClr val="242A33"/>
+                </a:solidFill>
+                <a:latin typeface="Consolas"/>
+                <a:ea typeface="Consolas"/>
+              </a:rPr>
+              <a:t>&gt;</a:t>
+            </a:r>
+            <a:r>
+              <a:rPr sz="2000" b="0" i="0">
+                <a:solidFill>
+                  <a:srgbClr val="242A33"/>
+                </a:solidFill>
+                <a:latin typeface="Segoe UI"/>
+                <a:ea typeface="微软雅黑"/>
+              </a:rPr>
+              <a:t> 而非 </a:t>
+            </a:r>
+            <a:r>
+              <a:rPr sz="1879" b="0" i="0">
+                <a:solidFill>
+                  <a:srgbClr val="242A33"/>
+                </a:solidFill>
+                <a:latin typeface="Consolas"/>
+                <a:ea typeface="Consolas"/>
+              </a:rPr>
+              <a:t>&gt;=</a:t>
+            </a:r>
+          </a:p>
+        </p:txBody>
+      </p:sp>
+      <p:sp>
+        <p:nvSpPr>
+          <p:cNvPr id="5" name="TextBox 4"/>
+          <p:cNvSpPr txBox="1"/>
+          <p:nvPr/>
+        </p:nvSpPr>
+        <p:spPr>
+          <a:xfrm>
+            <a:off x="566928" y="6327648"/>
+            <a:ext cx="8229600" cy="310896"/>
+          </a:xfrm>
+          <a:prstGeom prst="rect">
+            <a:avLst/>
+          </a:prstGeom>
+          <a:noFill/>
+        </p:spPr>
+        <p:txBody>
+          <a:bodyPr wrap="square" lIns="0" rIns="0" tIns="0" bIns="0">
+            <a:noAutofit/>
+          </a:bodyPr>
+          <a:lstStyle/>
+          <a:p>
+            <a:pPr algn="l">
+              <a:spcBef>
+                <a:spcPts val="0"/>
+              </a:spcBef>
+              <a:spcAft>
+                <a:spcPts val="0"/>
+              </a:spcAft>
+            </a:pPr>
+            <a:r>
+              <a:rPr sz="1000" b="0" i="0">
+                <a:solidFill>
+                  <a:srgbClr val="6B7582"/>
+                </a:solidFill>
+                <a:latin typeface="Segoe UI"/>
+                <a:ea typeface="微软雅黑"/>
+              </a:rPr>
+              <a:t>计算概论（B） · 第5周 · 闫宏飞 · 2026 Fall</a:t>
+            </a:r>
+          </a:p>
+        </p:txBody>
+      </p:sp>
+      <p:sp>
+        <p:nvSpPr>
+          <p:cNvPr id="6" name="TextBox 5"/>
+          <p:cNvSpPr txBox="1"/>
+          <p:nvPr/>
+        </p:nvSpPr>
+        <p:spPr>
+          <a:xfrm>
+            <a:off x="10710367" y="6327648"/>
+            <a:ext cx="914400" cy="310896"/>
+          </a:xfrm>
+          <a:prstGeom prst="rect">
+            <a:avLst/>
+          </a:prstGeom>
+          <a:noFill/>
+        </p:spPr>
+        <p:txBody>
+          <a:bodyPr wrap="square" lIns="0" rIns="0" tIns="0" bIns="0">
+            <a:noAutofit/>
+          </a:bodyPr>
+          <a:lstStyle/>
+          <a:p>
+            <a:pPr algn="r">
+              <a:spcBef>
+                <a:spcPts val="0"/>
+              </a:spcBef>
+              <a:spcAft>
+                <a:spcPts val="0"/>
+              </a:spcAft>
+            </a:pPr>
+            <a:r>
+              <a:rPr sz="1000" b="0" i="0">
+                <a:solidFill>
+                  <a:srgbClr val="6B7582"/>
+                </a:solidFill>
+                <a:latin typeface="Segoe UI"/>
+                <a:ea typeface="微软雅黑"/>
+              </a:rPr>
+              <a:t>11</a:t>
+            </a:r>
+          </a:p>
+        </p:txBody>
+      </p:sp>
+    </p:spTree>
+  </p:cSld>
+  <p:clrMapOvr>
+    <a:masterClrMapping/>
+  </p:clrMapOvr>
+</p:sld>
+</file>
+
+<file path=ppt/slides/slide12.xml><?xml version="1.0" encoding="utf-8"?>
 <p:sld xmlns:a="http://schemas.openxmlformats.org/drawingml/2006/main" xmlns:p="http://schemas.openxmlformats.org/presentationml/2006/main" xmlns:r="http://schemas.openxmlformats.org/officeDocument/2006/relationships">
   <p:cSld>
     <p:spTree>
@@ -4174,7 +4553,7 @@
                 <a:latin typeface="Segoe UI"/>
                 <a:ea typeface="微软雅黑"/>
               </a:rPr>
-              <a:t>11</a:t>
+              <a:t>12</a:t>
             </a:r>
           </a:p>
         </p:txBody>
@@ -4187,7 +4566,7 @@
 </p:sld>
 </file>
 
-<file path=ppt/slides/slide12.xml><?xml version="1.0" encoding="utf-8"?>
+<file path=ppt/slides/slide13.xml><?xml version="1.0" encoding="utf-8"?>
 <p:sld xmlns:a="http://schemas.openxmlformats.org/drawingml/2006/main" xmlns:p="http://schemas.openxmlformats.org/presentationml/2006/main" xmlns:r="http://schemas.openxmlformats.org/officeDocument/2006/relationships">
   <p:cSld>
     <p:spTree>
@@ -4235,7 +4614,7 @@
                 <a:latin typeface="Segoe UI"/>
                 <a:ea typeface="微软雅黑"/>
               </a:rPr>
-              <a:t>T2 单词首字母大写（20 分）</a:t>
+              <a:t>T2 单词首字母大写（15 分）</a:t>
             </a:r>
           </a:p>
         </p:txBody>
@@ -4776,7 +5155,7 @@
                 <a:latin typeface="Segoe UI"/>
                 <a:ea typeface="微软雅黑"/>
               </a:rPr>
-              <a:t>12</a:t>
+              <a:t>13</a:t>
             </a:r>
           </a:p>
         </p:txBody>
@@ -4789,7 +5168,7 @@
 </p:sld>
 </file>
 
-<file path=ppt/slides/slide13.xml><?xml version="1.0" encoding="utf-8"?>
+<file path=ppt/slides/slide14.xml><?xml version="1.0" encoding="utf-8"?>
 <p:sld xmlns:a="http://schemas.openxmlformats.org/drawingml/2006/main" xmlns:p="http://schemas.openxmlformats.org/presentationml/2006/main" xmlns:r="http://schemas.openxmlformats.org/officeDocument/2006/relationships">
   <p:cSld>
     <p:spTree>
@@ -4837,7 +5216,7 @@
                 <a:latin typeface="Segoe UI"/>
                 <a:ea typeface="微软雅黑"/>
               </a:rPr>
-              <a:t>T3 图书借阅排行（20 分）</a:t>
+              <a:t>T3 图书借阅排行（15 分）</a:t>
             </a:r>
           </a:p>
         </p:txBody>
@@ -5263,7 +5642,7 @@
                 <a:latin typeface="Segoe UI"/>
                 <a:ea typeface="微软雅黑"/>
               </a:rPr>
-              <a:t>13</a:t>
+              <a:t>14</a:t>
             </a:r>
           </a:p>
         </p:txBody>
@@ -5276,7 +5655,7 @@
 </p:sld>
 </file>
 
-<file path=ppt/slides/slide14.xml><?xml version="1.0" encoding="utf-8"?>
+<file path=ppt/slides/slide15.xml><?xml version="1.0" encoding="utf-8"?>
 <p:sld xmlns:a="http://schemas.openxmlformats.org/drawingml/2006/main" xmlns:p="http://schemas.openxmlformats.org/presentationml/2006/main" xmlns:r="http://schemas.openxmlformats.org/officeDocument/2006/relationships">
   <p:cSld>
     <p:spTree>
@@ -5324,7 +5703,7 @@
                 <a:latin typeface="Segoe UI"/>
                 <a:ea typeface="微软雅黑"/>
               </a:rPr>
-              <a:t>T4 区间内的 T-数（20 分）</a:t>
+              <a:t>T4 区间内的 T-数（15 分）</a:t>
             </a:r>
           </a:p>
         </p:txBody>
@@ -6164,7 +6543,7 @@
                 <a:latin typeface="Segoe UI"/>
                 <a:ea typeface="微软雅黑"/>
               </a:rPr>
-              <a:t>14</a:t>
+              <a:t>15</a:t>
             </a:r>
           </a:p>
         </p:txBody>
@@ -6177,7 +6556,7 @@
 </p:sld>
 </file>
 
-<file path=ppt/slides/slide15.xml><?xml version="1.0" encoding="utf-8"?>
+<file path=ppt/slides/slide16.xml><?xml version="1.0" encoding="utf-8"?>
 <p:sld xmlns:a="http://schemas.openxmlformats.org/drawingml/2006/main" xmlns:p="http://schemas.openxmlformats.org/presentationml/2006/main" xmlns:r="http://schemas.openxmlformats.org/officeDocument/2006/relationships">
   <p:cSld>
     <p:spTree>
@@ -6225,7 +6604,7 @@
                 <a:latin typeface="Segoe UI"/>
                 <a:ea typeface="微软雅黑"/>
               </a:rPr>
-              <a:t>T5 电梯调度模拟（25 分）</a:t>
+              <a:t>T5 电梯调度模拟（20 分）</a:t>
             </a:r>
           </a:p>
         </p:txBody>
@@ -6835,7 +7214,7 @@
                 <a:latin typeface="Segoe UI"/>
                 <a:ea typeface="微软雅黑"/>
               </a:rPr>
-              <a:t>15</a:t>
+              <a:t>16</a:t>
             </a:r>
           </a:p>
         </p:txBody>
@@ -6848,7 +7227,1298 @@
 </p:sld>
 </file>
 
-<file path=ppt/slides/slide16.xml><?xml version="1.0" encoding="utf-8"?>
+<file path=ppt/slides/slide17.xml><?xml version="1.0" encoding="utf-8"?>
+<p:sld xmlns:a="http://schemas.openxmlformats.org/drawingml/2006/main" xmlns:p="http://schemas.openxmlformats.org/presentationml/2006/main" xmlns:r="http://schemas.openxmlformats.org/officeDocument/2006/relationships">
+  <p:cSld>
+    <p:spTree>
+      <p:nvGrpSpPr>
+        <p:cNvPr id="1" name=""/>
+        <p:cNvGrpSpPr/>
+        <p:nvPr/>
+      </p:nvGrpSpPr>
+      <p:grpSpPr/>
+      <p:sp>
+        <p:nvSpPr>
+          <p:cNvPr id="2" name="TextBox 1"/>
+          <p:cNvSpPr txBox="1"/>
+          <p:nvPr/>
+        </p:nvSpPr>
+        <p:spPr>
+          <a:xfrm>
+            <a:off x="566928" y="420624"/>
+            <a:ext cx="11057839" cy="548640"/>
+          </a:xfrm>
+          <a:prstGeom prst="rect">
+            <a:avLst/>
+          </a:prstGeom>
+          <a:noFill/>
+        </p:spPr>
+        <p:txBody>
+          <a:bodyPr wrap="square" lIns="0" rIns="0" tIns="0" bIns="0">
+            <a:noAutofit/>
+          </a:bodyPr>
+          <a:lstStyle/>
+          <a:p>
+            <a:pPr algn="l">
+              <a:spcBef>
+                <a:spcPts val="0"/>
+              </a:spcBef>
+              <a:spcAft>
+                <a:spcPts val="0"/>
+              </a:spcAft>
+            </a:pPr>
+            <a:r>
+              <a:rPr sz="2600" b="1" i="0">
+                <a:solidFill>
+                  <a:srgbClr val="12395B"/>
+                </a:solidFill>
+                <a:latin typeface="Segoe UI"/>
+                <a:ea typeface="微软雅黑"/>
+              </a:rPr>
+              <a:t>T6 补码计算器（20 分）</a:t>
+            </a:r>
+          </a:p>
+        </p:txBody>
+      </p:sp>
+      <p:sp>
+        <p:nvSpPr>
+          <p:cNvPr id="3" name="Rectangle 2"/>
+          <p:cNvSpPr/>
+          <p:nvPr/>
+        </p:nvSpPr>
+        <p:spPr>
+          <a:xfrm>
+            <a:off x="566928" y="1060704"/>
+            <a:ext cx="960120" cy="40640"/>
+          </a:xfrm>
+          <a:prstGeom prst="rect">
+            <a:avLst/>
+          </a:prstGeom>
+          <a:solidFill>
+            <a:srgbClr val="E07B39"/>
+          </a:solidFill>
+          <a:ln>
+            <a:noFill/>
+          </a:ln>
+          <a:effectLst/>
+        </p:spPr>
+        <p:style>
+          <a:lnRef idx="1">
+            <a:schemeClr val="accent1"/>
+          </a:lnRef>
+          <a:fillRef idx="3">
+            <a:schemeClr val="accent1"/>
+          </a:fillRef>
+          <a:effectRef idx="2">
+            <a:schemeClr val="accent1"/>
+          </a:effectRef>
+          <a:fontRef idx="minor">
+            <a:schemeClr val="lt1"/>
+          </a:fontRef>
+        </p:style>
+        <p:txBody>
+          <a:bodyPr rtlCol="0" anchor="ctr"/>
+          <a:lstStyle/>
+          <a:p>
+            <a:pPr algn="ctr"/>
+          </a:p>
+        </p:txBody>
+      </p:sp>
+      <p:sp>
+        <p:nvSpPr>
+          <p:cNvPr id="4" name="Rectangle 3"/>
+          <p:cNvSpPr/>
+          <p:nvPr/>
+        </p:nvSpPr>
+        <p:spPr>
+          <a:xfrm>
+            <a:off x="566928" y="1298448"/>
+            <a:ext cx="11057839" cy="4443984"/>
+          </a:xfrm>
+          <a:prstGeom prst="rect">
+            <a:avLst/>
+          </a:prstGeom>
+          <a:solidFill>
+            <a:srgbClr val="F6F7F9"/>
+          </a:solidFill>
+          <a:ln w="9525">
+            <a:solidFill>
+              <a:srgbClr val="D6DCE4"/>
+            </a:solidFill>
+          </a:ln>
+          <a:effectLst/>
+        </p:spPr>
+        <p:style>
+          <a:lnRef idx="1">
+            <a:schemeClr val="accent1"/>
+          </a:lnRef>
+          <a:fillRef idx="3">
+            <a:schemeClr val="accent1"/>
+          </a:fillRef>
+          <a:effectRef idx="2">
+            <a:schemeClr val="accent1"/>
+          </a:effectRef>
+          <a:fontRef idx="minor">
+            <a:schemeClr val="lt1"/>
+          </a:fontRef>
+        </p:style>
+        <p:txBody>
+          <a:bodyPr rtlCol="0" anchor="ctr"/>
+          <a:lstStyle/>
+          <a:p>
+            <a:pPr algn="ctr"/>
+          </a:p>
+        </p:txBody>
+      </p:sp>
+      <p:sp>
+        <p:nvSpPr>
+          <p:cNvPr id="5" name="TextBox 4"/>
+          <p:cNvSpPr txBox="1"/>
+          <p:nvPr/>
+        </p:nvSpPr>
+        <p:spPr>
+          <a:xfrm>
+            <a:off x="822960" y="1399032"/>
+            <a:ext cx="10545775" cy="4242816"/>
+          </a:xfrm>
+          <a:prstGeom prst="rect">
+            <a:avLst/>
+          </a:prstGeom>
+          <a:noFill/>
+        </p:spPr>
+        <p:txBody>
+          <a:bodyPr wrap="square" lIns="0" rIns="0" tIns="0" bIns="0">
+            <a:noAutofit/>
+          </a:bodyPr>
+          <a:lstStyle/>
+          <a:p>
+            <a:pPr algn="l">
+              <a:lnSpc>
+                <a:spcPts val="1366"/>
+              </a:lnSpc>
+              <a:spcBef>
+                <a:spcPts val="0"/>
+              </a:spcBef>
+              <a:spcAft>
+                <a:spcPts val="0"/>
+              </a:spcAft>
+            </a:pPr>
+            <a:r>
+              <a:rPr sz="1051" b="0" i="0">
+                <a:solidFill>
+                  <a:srgbClr val="242A33"/>
+                </a:solidFill>
+                <a:latin typeface="Consolas"/>
+                <a:ea typeface="Consolas"/>
+              </a:rPr>
+              <a:t>import sys</a:t>
+            </a:r>
+          </a:p>
+          <a:p>
+            <a:pPr algn="l">
+              <a:lnSpc>
+                <a:spcPts val="1366"/>
+              </a:lnSpc>
+              <a:spcBef>
+                <a:spcPts val="0"/>
+              </a:spcBef>
+              <a:spcAft>
+                <a:spcPts val="0"/>
+              </a:spcAft>
+            </a:pPr>
+            <a:r>
+              <a:rPr sz="1051" b="0" i="0">
+                <a:solidFill>
+                  <a:srgbClr val="242A33"/>
+                </a:solidFill>
+                <a:latin typeface="Consolas"/>
+                <a:ea typeface="Consolas"/>
+              </a:rPr>
+              <a:t> </a:t>
+            </a:r>
+          </a:p>
+          <a:p>
+            <a:pPr algn="l">
+              <a:lnSpc>
+                <a:spcPts val="1366"/>
+              </a:lnSpc>
+              <a:spcBef>
+                <a:spcPts val="0"/>
+              </a:spcBef>
+              <a:spcAft>
+                <a:spcPts val="0"/>
+              </a:spcAft>
+            </a:pPr>
+            <a:r>
+              <a:rPr sz="1051" b="0" i="0">
+                <a:solidFill>
+                  <a:srgbClr val="242A33"/>
+                </a:solidFill>
+                <a:latin typeface="Consolas"/>
+                <a:ea typeface="Consolas"/>
+              </a:rPr>
+              <a:t>data = sys.stdin.read().split()</a:t>
+            </a:r>
+          </a:p>
+          <a:p>
+            <a:pPr algn="l">
+              <a:lnSpc>
+                <a:spcPts val="1366"/>
+              </a:lnSpc>
+              <a:spcBef>
+                <a:spcPts val="0"/>
+              </a:spcBef>
+              <a:spcAft>
+                <a:spcPts val="0"/>
+              </a:spcAft>
+            </a:pPr>
+            <a:r>
+              <a:rPr sz="1051" b="0" i="0">
+                <a:solidFill>
+                  <a:srgbClr val="242A33"/>
+                </a:solidFill>
+                <a:latin typeface="Consolas"/>
+                <a:ea typeface="Consolas"/>
+              </a:rPr>
+              <a:t>q = int(data[0])</a:t>
+            </a:r>
+          </a:p>
+          <a:p>
+            <a:pPr algn="l">
+              <a:lnSpc>
+                <a:spcPts val="1366"/>
+              </a:lnSpc>
+              <a:spcBef>
+                <a:spcPts val="0"/>
+              </a:spcBef>
+              <a:spcAft>
+                <a:spcPts val="0"/>
+              </a:spcAft>
+            </a:pPr>
+            <a:r>
+              <a:rPr sz="1051" b="0" i="0">
+                <a:solidFill>
+                  <a:srgbClr val="242A33"/>
+                </a:solidFill>
+                <a:latin typeface="Consolas"/>
+                <a:ea typeface="Consolas"/>
+              </a:rPr>
+              <a:t>idx, out = 1, []</a:t>
+            </a:r>
+          </a:p>
+          <a:p>
+            <a:pPr algn="l">
+              <a:lnSpc>
+                <a:spcPts val="1366"/>
+              </a:lnSpc>
+              <a:spcBef>
+                <a:spcPts val="0"/>
+              </a:spcBef>
+              <a:spcAft>
+                <a:spcPts val="0"/>
+              </a:spcAft>
+            </a:pPr>
+            <a:r>
+              <a:rPr sz="1051" b="0" i="0">
+                <a:solidFill>
+                  <a:srgbClr val="242A33"/>
+                </a:solidFill>
+                <a:latin typeface="Consolas"/>
+                <a:ea typeface="Consolas"/>
+              </a:rPr>
+              <a:t>for _ in range(q):</a:t>
+            </a:r>
+          </a:p>
+          <a:p>
+            <a:pPr algn="l">
+              <a:lnSpc>
+                <a:spcPts val="1366"/>
+              </a:lnSpc>
+              <a:spcBef>
+                <a:spcPts val="0"/>
+              </a:spcBef>
+              <a:spcAft>
+                <a:spcPts val="0"/>
+              </a:spcAft>
+            </a:pPr>
+            <a:r>
+              <a:rPr sz="1051" b="0" i="0">
+                <a:solidFill>
+                  <a:srgbClr val="242A33"/>
+                </a:solidFill>
+                <a:latin typeface="Consolas"/>
+                <a:ea typeface="Consolas"/>
+              </a:rPr>
+              <a:t>    op = data[idx]; idx += 1</a:t>
+            </a:r>
+          </a:p>
+          <a:p>
+            <a:pPr algn="l">
+              <a:lnSpc>
+                <a:spcPts val="1366"/>
+              </a:lnSpc>
+              <a:spcBef>
+                <a:spcPts val="0"/>
+              </a:spcBef>
+              <a:spcAft>
+                <a:spcPts val="0"/>
+              </a:spcAft>
+            </a:pPr>
+            <a:r>
+              <a:rPr sz="1051" b="0" i="0">
+                <a:solidFill>
+                  <a:srgbClr val="242A33"/>
+                </a:solidFill>
+                <a:latin typeface="Consolas"/>
+                <a:ea typeface="Consolas"/>
+              </a:rPr>
+              <a:t>    if op == 'TO':                               # 十进制 -&gt; n 位补码</a:t>
+            </a:r>
+          </a:p>
+          <a:p>
+            <a:pPr algn="l">
+              <a:lnSpc>
+                <a:spcPts val="1366"/>
+              </a:lnSpc>
+              <a:spcBef>
+                <a:spcPts val="0"/>
+              </a:spcBef>
+              <a:spcAft>
+                <a:spcPts val="0"/>
+              </a:spcAft>
+            </a:pPr>
+            <a:r>
+              <a:rPr sz="1051" b="0" i="0">
+                <a:solidFill>
+                  <a:srgbClr val="242A33"/>
+                </a:solidFill>
+                <a:latin typeface="Consolas"/>
+                <a:ea typeface="Consolas"/>
+              </a:rPr>
+              <a:t>        n, x = int(data[idx]), int(data[idx + 1]); idx += 2</a:t>
+            </a:r>
+          </a:p>
+          <a:p>
+            <a:pPr algn="l">
+              <a:lnSpc>
+                <a:spcPts val="1366"/>
+              </a:lnSpc>
+              <a:spcBef>
+                <a:spcPts val="0"/>
+              </a:spcBef>
+              <a:spcAft>
+                <a:spcPts val="0"/>
+              </a:spcAft>
+            </a:pPr>
+            <a:r>
+              <a:rPr sz="1051" b="0" i="0">
+                <a:solidFill>
+                  <a:srgbClr val="242A33"/>
+                </a:solidFill>
+                <a:latin typeface="Consolas"/>
+                <a:ea typeface="Consolas"/>
+              </a:rPr>
+              <a:t>        lo, hi = -(1 &lt;&lt; (n - 1)), (1 &lt;&lt; (n - 1)) - 1</a:t>
+            </a:r>
+          </a:p>
+          <a:p>
+            <a:pPr algn="l">
+              <a:lnSpc>
+                <a:spcPts val="1366"/>
+              </a:lnSpc>
+              <a:spcBef>
+                <a:spcPts val="0"/>
+              </a:spcBef>
+              <a:spcAft>
+                <a:spcPts val="0"/>
+              </a:spcAft>
+            </a:pPr>
+            <a:r>
+              <a:rPr sz="1051" b="0" i="0">
+                <a:solidFill>
+                  <a:srgbClr val="242A33"/>
+                </a:solidFill>
+                <a:latin typeface="Consolas"/>
+                <a:ea typeface="Consolas"/>
+              </a:rPr>
+              <a:t>        out.append('OVERFLOW' if not lo &lt;= x &lt;= hi</a:t>
+            </a:r>
+          </a:p>
+          <a:p>
+            <a:pPr algn="l">
+              <a:lnSpc>
+                <a:spcPts val="1366"/>
+              </a:lnSpc>
+              <a:spcBef>
+                <a:spcPts val="0"/>
+              </a:spcBef>
+              <a:spcAft>
+                <a:spcPts val="0"/>
+              </a:spcAft>
+            </a:pPr>
+            <a:r>
+              <a:rPr sz="1051" b="0" i="0">
+                <a:solidFill>
+                  <a:srgbClr val="242A33"/>
+                </a:solidFill>
+                <a:latin typeface="Consolas"/>
+                <a:ea typeface="Consolas"/>
+              </a:rPr>
+              <a:t>                   else format(x &amp; ((1 &lt;&lt; n) - 1), f'0{n}b'))</a:t>
+            </a:r>
+          </a:p>
+          <a:p>
+            <a:pPr algn="l">
+              <a:lnSpc>
+                <a:spcPts val="1366"/>
+              </a:lnSpc>
+              <a:spcBef>
+                <a:spcPts val="0"/>
+              </a:spcBef>
+              <a:spcAft>
+                <a:spcPts val="0"/>
+              </a:spcAft>
+            </a:pPr>
+            <a:r>
+              <a:rPr sz="1051" b="0" i="0">
+                <a:solidFill>
+                  <a:srgbClr val="242A33"/>
+                </a:solidFill>
+                <a:latin typeface="Consolas"/>
+                <a:ea typeface="Consolas"/>
+              </a:rPr>
+              <a:t>    elif op == 'FROM':                           # n 位补码 -&gt; 十进制</a:t>
+            </a:r>
+          </a:p>
+          <a:p>
+            <a:pPr algn="l">
+              <a:lnSpc>
+                <a:spcPts val="1366"/>
+              </a:lnSpc>
+              <a:spcBef>
+                <a:spcPts val="0"/>
+              </a:spcBef>
+              <a:spcAft>
+                <a:spcPts val="0"/>
+              </a:spcAft>
+            </a:pPr>
+            <a:r>
+              <a:rPr sz="1051" b="0" i="0">
+                <a:solidFill>
+                  <a:srgbClr val="242A33"/>
+                </a:solidFill>
+                <a:latin typeface="Consolas"/>
+                <a:ea typeface="Consolas"/>
+              </a:rPr>
+              <a:t>        n, b = int(data[idx]), data[idx + 1]; idx += 2</a:t>
+            </a:r>
+          </a:p>
+          <a:p>
+            <a:pPr algn="l">
+              <a:lnSpc>
+                <a:spcPts val="1366"/>
+              </a:lnSpc>
+              <a:spcBef>
+                <a:spcPts val="0"/>
+              </a:spcBef>
+              <a:spcAft>
+                <a:spcPts val="0"/>
+              </a:spcAft>
+            </a:pPr>
+            <a:r>
+              <a:rPr sz="1051" b="0" i="0">
+                <a:solidFill>
+                  <a:srgbClr val="242A33"/>
+                </a:solidFill>
+                <a:latin typeface="Consolas"/>
+                <a:ea typeface="Consolas"/>
+              </a:rPr>
+              <a:t>        v = int(b, 2)</a:t>
+            </a:r>
+          </a:p>
+          <a:p>
+            <a:pPr algn="l">
+              <a:lnSpc>
+                <a:spcPts val="1366"/>
+              </a:lnSpc>
+              <a:spcBef>
+                <a:spcPts val="0"/>
+              </a:spcBef>
+              <a:spcAft>
+                <a:spcPts val="0"/>
+              </a:spcAft>
+            </a:pPr>
+            <a:r>
+              <a:rPr sz="1051" b="0" i="0">
+                <a:solidFill>
+                  <a:srgbClr val="242A33"/>
+                </a:solidFill>
+                <a:latin typeface="Consolas"/>
+                <a:ea typeface="Consolas"/>
+              </a:rPr>
+              <a:t>        out.append(str(v - (1 &lt;&lt; n) if v &gt;&gt; (n - 1) else v))</a:t>
+            </a:r>
+          </a:p>
+          <a:p>
+            <a:pPr algn="l">
+              <a:lnSpc>
+                <a:spcPts val="1366"/>
+              </a:lnSpc>
+              <a:spcBef>
+                <a:spcPts val="0"/>
+              </a:spcBef>
+              <a:spcAft>
+                <a:spcPts val="0"/>
+              </a:spcAft>
+            </a:pPr>
+            <a:r>
+              <a:rPr sz="1051" b="0" i="0">
+                <a:solidFill>
+                  <a:srgbClr val="242A33"/>
+                </a:solidFill>
+                <a:latin typeface="Consolas"/>
+                <a:ea typeface="Consolas"/>
+              </a:rPr>
+              <a:t>    else:                                        # ADD：n 位回绕 + 溢出判定</a:t>
+            </a:r>
+          </a:p>
+          <a:p>
+            <a:pPr algn="l">
+              <a:lnSpc>
+                <a:spcPts val="1366"/>
+              </a:lnSpc>
+              <a:spcBef>
+                <a:spcPts val="0"/>
+              </a:spcBef>
+              <a:spcAft>
+                <a:spcPts val="0"/>
+              </a:spcAft>
+            </a:pPr>
+            <a:r>
+              <a:rPr sz="1051" b="0" i="0">
+                <a:solidFill>
+                  <a:srgbClr val="242A33"/>
+                </a:solidFill>
+                <a:latin typeface="Consolas"/>
+                <a:ea typeface="Consolas"/>
+              </a:rPr>
+              <a:t>        n = int(data[idx])</a:t>
+            </a:r>
+          </a:p>
+          <a:p>
+            <a:pPr algn="l">
+              <a:lnSpc>
+                <a:spcPts val="1366"/>
+              </a:lnSpc>
+              <a:spcBef>
+                <a:spcPts val="0"/>
+              </a:spcBef>
+              <a:spcAft>
+                <a:spcPts val="0"/>
+              </a:spcAft>
+            </a:pPr>
+            <a:r>
+              <a:rPr sz="1051" b="0" i="0">
+                <a:solidFill>
+                  <a:srgbClr val="242A33"/>
+                </a:solidFill>
+                <a:latin typeface="Consolas"/>
+                <a:ea typeface="Consolas"/>
+              </a:rPr>
+              <a:t>        a, b = int(data[idx + 1]), int(data[idx + 2]); idx += 3</a:t>
+            </a:r>
+          </a:p>
+          <a:p>
+            <a:pPr algn="l">
+              <a:lnSpc>
+                <a:spcPts val="1366"/>
+              </a:lnSpc>
+              <a:spcBef>
+                <a:spcPts val="0"/>
+              </a:spcBef>
+              <a:spcAft>
+                <a:spcPts val="0"/>
+              </a:spcAft>
+            </a:pPr>
+            <a:r>
+              <a:rPr sz="1051" b="0" i="0">
+                <a:solidFill>
+                  <a:srgbClr val="242A33"/>
+                </a:solidFill>
+                <a:latin typeface="Consolas"/>
+                <a:ea typeface="Consolas"/>
+              </a:rPr>
+              <a:t>        r = (a + b) &amp; ((1 &lt;&lt; n) - 1)</a:t>
+            </a:r>
+          </a:p>
+          <a:p>
+            <a:pPr algn="l">
+              <a:lnSpc>
+                <a:spcPts val="1366"/>
+              </a:lnSpc>
+              <a:spcBef>
+                <a:spcPts val="0"/>
+              </a:spcBef>
+              <a:spcAft>
+                <a:spcPts val="0"/>
+              </a:spcAft>
+            </a:pPr>
+            <a:r>
+              <a:rPr sz="1051" b="0" i="0">
+                <a:solidFill>
+                  <a:srgbClr val="242A33"/>
+                </a:solidFill>
+                <a:latin typeface="Consolas"/>
+                <a:ea typeface="Consolas"/>
+              </a:rPr>
+              <a:t>        if r &gt;&gt; (n - 1):</a:t>
+            </a:r>
+          </a:p>
+          <a:p>
+            <a:pPr algn="l">
+              <a:lnSpc>
+                <a:spcPts val="1366"/>
+              </a:lnSpc>
+              <a:spcBef>
+                <a:spcPts val="0"/>
+              </a:spcBef>
+              <a:spcAft>
+                <a:spcPts val="0"/>
+              </a:spcAft>
+            </a:pPr>
+            <a:r>
+              <a:rPr sz="1051" b="0" i="0">
+                <a:solidFill>
+                  <a:srgbClr val="242A33"/>
+                </a:solidFill>
+                <a:latin typeface="Consolas"/>
+                <a:ea typeface="Consolas"/>
+              </a:rPr>
+              <a:t>            r -= 1 &lt;&lt; n</a:t>
+            </a:r>
+          </a:p>
+          <a:p>
+            <a:pPr algn="l">
+              <a:lnSpc>
+                <a:spcPts val="1366"/>
+              </a:lnSpc>
+              <a:spcBef>
+                <a:spcPts val="0"/>
+              </a:spcBef>
+              <a:spcAft>
+                <a:spcPts val="0"/>
+              </a:spcAft>
+            </a:pPr>
+            <a:r>
+              <a:rPr sz="1051" b="0" i="0">
+                <a:solidFill>
+                  <a:srgbClr val="242A33"/>
+                </a:solidFill>
+                <a:latin typeface="Consolas"/>
+                <a:ea typeface="Consolas"/>
+              </a:rPr>
+              <a:t>        out.append(str(r) if r == a + b else f'{r} OVERFLOW')</a:t>
+            </a:r>
+          </a:p>
+          <a:p>
+            <a:pPr algn="l">
+              <a:lnSpc>
+                <a:spcPts val="1366"/>
+              </a:lnSpc>
+              <a:spcBef>
+                <a:spcPts val="0"/>
+              </a:spcBef>
+              <a:spcAft>
+                <a:spcPts val="0"/>
+              </a:spcAft>
+            </a:pPr>
+            <a:r>
+              <a:rPr sz="1051" b="0" i="0">
+                <a:solidFill>
+                  <a:srgbClr val="242A33"/>
+                </a:solidFill>
+                <a:latin typeface="Consolas"/>
+                <a:ea typeface="Consolas"/>
+              </a:rPr>
+              <a:t>sys.stdout.write('\n'.join(out) + '\n')</a:t>
+            </a:r>
+          </a:p>
+        </p:txBody>
+      </p:sp>
+      <p:sp>
+        <p:nvSpPr>
+          <p:cNvPr id="6" name="TextBox 5"/>
+          <p:cNvSpPr txBox="1"/>
+          <p:nvPr/>
+        </p:nvSpPr>
+        <p:spPr>
+          <a:xfrm>
+            <a:off x="566928" y="5861304"/>
+            <a:ext cx="11057839" cy="329184"/>
+          </a:xfrm>
+          <a:prstGeom prst="rect">
+            <a:avLst/>
+          </a:prstGeom>
+          <a:noFill/>
+        </p:spPr>
+        <p:txBody>
+          <a:bodyPr wrap="square" lIns="0" rIns="0" tIns="0" bIns="0">
+            <a:noAutofit/>
+          </a:bodyPr>
+          <a:lstStyle/>
+          <a:p>
+            <a:pPr algn="l">
+              <a:spcBef>
+                <a:spcPts val="0"/>
+              </a:spcBef>
+              <a:spcAft>
+                <a:spcPts val="0"/>
+              </a:spcAft>
+            </a:pPr>
+            <a:r>
+              <a:rPr sz="1300" b="0" i="0">
+                <a:solidFill>
+                  <a:srgbClr val="6B7582"/>
+                </a:solidFill>
+                <a:latin typeface="Segoe UI"/>
+                <a:ea typeface="微软雅黑"/>
+              </a:rPr>
+              <a:t>溢出判据 r != a+b 比背"正加正得负"更不易写错</a:t>
+            </a:r>
+          </a:p>
+        </p:txBody>
+      </p:sp>
+      <p:sp>
+        <p:nvSpPr>
+          <p:cNvPr id="7" name="TextBox 6"/>
+          <p:cNvSpPr txBox="1"/>
+          <p:nvPr/>
+        </p:nvSpPr>
+        <p:spPr>
+          <a:xfrm>
+            <a:off x="566928" y="6327648"/>
+            <a:ext cx="8229600" cy="310896"/>
+          </a:xfrm>
+          <a:prstGeom prst="rect">
+            <a:avLst/>
+          </a:prstGeom>
+          <a:noFill/>
+        </p:spPr>
+        <p:txBody>
+          <a:bodyPr wrap="square" lIns="0" rIns="0" tIns="0" bIns="0">
+            <a:noAutofit/>
+          </a:bodyPr>
+          <a:lstStyle/>
+          <a:p>
+            <a:pPr algn="l">
+              <a:spcBef>
+                <a:spcPts val="0"/>
+              </a:spcBef>
+              <a:spcAft>
+                <a:spcPts val="0"/>
+              </a:spcAft>
+            </a:pPr>
+            <a:r>
+              <a:rPr sz="1000" b="0" i="0">
+                <a:solidFill>
+                  <a:srgbClr val="6B7582"/>
+                </a:solidFill>
+                <a:latin typeface="Segoe UI"/>
+                <a:ea typeface="微软雅黑"/>
+              </a:rPr>
+              <a:t>计算概论（B） · 第5周 · 闫宏飞 · 2026 Fall</a:t>
+            </a:r>
+          </a:p>
+        </p:txBody>
+      </p:sp>
+      <p:sp>
+        <p:nvSpPr>
+          <p:cNvPr id="8" name="TextBox 7"/>
+          <p:cNvSpPr txBox="1"/>
+          <p:nvPr/>
+        </p:nvSpPr>
+        <p:spPr>
+          <a:xfrm>
+            <a:off x="10710367" y="6327648"/>
+            <a:ext cx="914400" cy="310896"/>
+          </a:xfrm>
+          <a:prstGeom prst="rect">
+            <a:avLst/>
+          </a:prstGeom>
+          <a:noFill/>
+        </p:spPr>
+        <p:txBody>
+          <a:bodyPr wrap="square" lIns="0" rIns="0" tIns="0" bIns="0">
+            <a:noAutofit/>
+          </a:bodyPr>
+          <a:lstStyle/>
+          <a:p>
+            <a:pPr algn="r">
+              <a:spcBef>
+                <a:spcPts val="0"/>
+              </a:spcBef>
+              <a:spcAft>
+                <a:spcPts val="0"/>
+              </a:spcAft>
+            </a:pPr>
+            <a:r>
+              <a:rPr sz="1000" b="0" i="0">
+                <a:solidFill>
+                  <a:srgbClr val="6B7582"/>
+                </a:solidFill>
+                <a:latin typeface="Segoe UI"/>
+                <a:ea typeface="微软雅黑"/>
+              </a:rPr>
+              <a:t>17</a:t>
+            </a:r>
+          </a:p>
+        </p:txBody>
+      </p:sp>
+    </p:spTree>
+  </p:cSld>
+  <p:clrMapOvr>
+    <a:masterClrMapping/>
+  </p:clrMapOvr>
+</p:sld>
+</file>
+
+<file path=ppt/slides/slide18.xml><?xml version="1.0" encoding="utf-8"?>
+<p:sld xmlns:a="http://schemas.openxmlformats.org/drawingml/2006/main" xmlns:p="http://schemas.openxmlformats.org/presentationml/2006/main" xmlns:r="http://schemas.openxmlformats.org/officeDocument/2006/relationships">
+  <p:cSld>
+    <p:spTree>
+      <p:nvGrpSpPr>
+        <p:cNvPr id="1" name=""/>
+        <p:cNvGrpSpPr/>
+        <p:nvPr/>
+      </p:nvGrpSpPr>
+      <p:grpSpPr/>
+      <p:sp>
+        <p:nvSpPr>
+          <p:cNvPr id="2" name="TextBox 1"/>
+          <p:cNvSpPr txBox="1"/>
+          <p:nvPr/>
+        </p:nvSpPr>
+        <p:spPr>
+          <a:xfrm>
+            <a:off x="566928" y="420624"/>
+            <a:ext cx="11057839" cy="548640"/>
+          </a:xfrm>
+          <a:prstGeom prst="rect">
+            <a:avLst/>
+          </a:prstGeom>
+          <a:noFill/>
+        </p:spPr>
+        <p:txBody>
+          <a:bodyPr wrap="square" lIns="0" rIns="0" tIns="0" bIns="0">
+            <a:noAutofit/>
+          </a:bodyPr>
+          <a:lstStyle/>
+          <a:p>
+            <a:pPr algn="l">
+              <a:spcBef>
+                <a:spcPts val="0"/>
+              </a:spcBef>
+              <a:spcAft>
+                <a:spcPts val="0"/>
+              </a:spcAft>
+            </a:pPr>
+            <a:r>
+              <a:rPr sz="2600" b="1" i="0">
+                <a:solidFill>
+                  <a:srgbClr val="12395B"/>
+                </a:solidFill>
+                <a:latin typeface="Segoe UI"/>
+                <a:ea typeface="微软雅黑"/>
+              </a:rPr>
+              <a:t>T6 的三个考点与最常见的错法</a:t>
+            </a:r>
+          </a:p>
+        </p:txBody>
+      </p:sp>
+      <p:sp>
+        <p:nvSpPr>
+          <p:cNvPr id="3" name="Rectangle 2"/>
+          <p:cNvSpPr/>
+          <p:nvPr/>
+        </p:nvSpPr>
+        <p:spPr>
+          <a:xfrm>
+            <a:off x="566928" y="1060704"/>
+            <a:ext cx="960120" cy="40640"/>
+          </a:xfrm>
+          <a:prstGeom prst="rect">
+            <a:avLst/>
+          </a:prstGeom>
+          <a:solidFill>
+            <a:srgbClr val="E07B39"/>
+          </a:solidFill>
+          <a:ln>
+            <a:noFill/>
+          </a:ln>
+          <a:effectLst/>
+        </p:spPr>
+        <p:style>
+          <a:lnRef idx="1">
+            <a:schemeClr val="accent1"/>
+          </a:lnRef>
+          <a:fillRef idx="3">
+            <a:schemeClr val="accent1"/>
+          </a:fillRef>
+          <a:effectRef idx="2">
+            <a:schemeClr val="accent1"/>
+          </a:effectRef>
+          <a:fontRef idx="minor">
+            <a:schemeClr val="lt1"/>
+          </a:fontRef>
+        </p:style>
+        <p:txBody>
+          <a:bodyPr rtlCol="0" anchor="ctr"/>
+          <a:lstStyle/>
+          <a:p>
+            <a:pPr algn="ctr"/>
+          </a:p>
+        </p:txBody>
+      </p:sp>
+      <p:sp>
+        <p:nvSpPr>
+          <p:cNvPr id="4" name="TextBox 3"/>
+          <p:cNvSpPr txBox="1"/>
+          <p:nvPr/>
+        </p:nvSpPr>
+        <p:spPr>
+          <a:xfrm>
+            <a:off x="566928" y="1298448"/>
+            <a:ext cx="11057839" cy="4864608"/>
+          </a:xfrm>
+          <a:prstGeom prst="rect">
+            <a:avLst/>
+          </a:prstGeom>
+          <a:noFill/>
+        </p:spPr>
+        <p:txBody>
+          <a:bodyPr wrap="square" lIns="0" rIns="0" tIns="0" bIns="0">
+            <a:noAutofit/>
+          </a:bodyPr>
+          <a:lstStyle/>
+          <a:p>
+            <a:pPr algn="l">
+              <a:lnSpc>
+                <a:spcPct val="132000"/>
+              </a:lnSpc>
+              <a:spcBef>
+                <a:spcPts val="0"/>
+              </a:spcBef>
+              <a:spcAft>
+                <a:spcPts val="1240"/>
+              </a:spcAft>
+            </a:pPr>
+            <a:r>
+              <a:rPr sz="2000" b="0" i="0">
+                <a:solidFill>
+                  <a:srgbClr val="242A33"/>
+                </a:solidFill>
+                <a:latin typeface="Segoe UI"/>
+                <a:ea typeface="微软雅黑"/>
+              </a:rPr>
+              <a:t>•  </a:t>
+            </a:r>
+            <a:r>
+              <a:rPr sz="2000" b="1" i="0">
+                <a:solidFill>
+                  <a:srgbClr val="12395B"/>
+                </a:solidFill>
+                <a:latin typeface="Segoe UI"/>
+                <a:ea typeface="微软雅黑"/>
+              </a:rPr>
+              <a:t>负数不能用 `bin(x)`</a:t>
+            </a:r>
+            <a:r>
+              <a:rPr sz="2000" b="0" i="0">
+                <a:solidFill>
+                  <a:srgbClr val="242A33"/>
+                </a:solidFill>
+                <a:latin typeface="Segoe UI"/>
+                <a:ea typeface="微软雅黑"/>
+              </a:rPr>
+              <a:t>：得到的是 </a:t>
+            </a:r>
+            <a:r>
+              <a:rPr sz="1879" b="0" i="0">
+                <a:solidFill>
+                  <a:srgbClr val="242A33"/>
+                </a:solidFill>
+                <a:latin typeface="Consolas"/>
+                <a:ea typeface="Consolas"/>
+              </a:rPr>
+              <a:t>-0b101</a:t>
+            </a:r>
+            <a:r>
+              <a:rPr sz="2000" b="0" i="0">
+                <a:solidFill>
+                  <a:srgbClr val="242A33"/>
+                </a:solidFill>
+                <a:latin typeface="Segoe UI"/>
+                <a:ea typeface="微软雅黑"/>
+              </a:rPr>
+              <a:t>，不是补码；要用 </a:t>
+            </a:r>
+            <a:r>
+              <a:rPr sz="1879" b="0" i="0">
+                <a:solidFill>
+                  <a:srgbClr val="242A33"/>
+                </a:solidFill>
+                <a:latin typeface="Consolas"/>
+                <a:ea typeface="Consolas"/>
+              </a:rPr>
+              <a:t>x &amp; ((1&lt;&lt;n)-1)</a:t>
+            </a:r>
+          </a:p>
+          <a:p>
+            <a:pPr algn="l">
+              <a:lnSpc>
+                <a:spcPct val="132000"/>
+              </a:lnSpc>
+              <a:spcBef>
+                <a:spcPts val="0"/>
+              </a:spcBef>
+              <a:spcAft>
+                <a:spcPts val="1240"/>
+              </a:spcAft>
+            </a:pPr>
+            <a:r>
+              <a:rPr sz="2000" b="0" i="0">
+                <a:solidFill>
+                  <a:srgbClr val="242A33"/>
+                </a:solidFill>
+                <a:latin typeface="Segoe UI"/>
+                <a:ea typeface="微软雅黑"/>
+              </a:rPr>
+              <a:t>•  </a:t>
+            </a:r>
+            <a:r>
+              <a:rPr sz="2000" b="1" i="0">
+                <a:solidFill>
+                  <a:srgbClr val="12395B"/>
+                </a:solidFill>
+                <a:latin typeface="Segoe UI"/>
+                <a:ea typeface="微软雅黑"/>
+              </a:rPr>
+              <a:t>`FROM` 忘了减 2^n</a:t>
+            </a:r>
+            <a:r>
+              <a:rPr sz="2000" b="0" i="0">
+                <a:solidFill>
+                  <a:srgbClr val="242A33"/>
+                </a:solidFill>
+                <a:latin typeface="Segoe UI"/>
+                <a:ea typeface="微软雅黑"/>
+              </a:rPr>
+              <a:t>：符号位为 1 时必须减掉，否则负数全变成大正数</a:t>
+            </a:r>
+          </a:p>
+          <a:p>
+            <a:pPr algn="l">
+              <a:lnSpc>
+                <a:spcPct val="132000"/>
+              </a:lnSpc>
+              <a:spcBef>
+                <a:spcPts val="0"/>
+              </a:spcBef>
+              <a:spcAft>
+                <a:spcPts val="1240"/>
+              </a:spcAft>
+            </a:pPr>
+            <a:r>
+              <a:rPr sz="2000" b="0" i="0">
+                <a:solidFill>
+                  <a:srgbClr val="242A33"/>
+                </a:solidFill>
+                <a:latin typeface="Segoe UI"/>
+                <a:ea typeface="微软雅黑"/>
+              </a:rPr>
+              <a:t>•  ⚠️ </a:t>
+            </a:r>
+            <a:r>
+              <a:rPr sz="2000" b="1" i="0">
+                <a:solidFill>
+                  <a:srgbClr val="12395B"/>
+                </a:solidFill>
+                <a:latin typeface="Segoe UI"/>
+                <a:ea typeface="微软雅黑"/>
+              </a:rPr>
+              <a:t>无符号进位 ≠ 有符号溢出</a:t>
+            </a:r>
+            <a:r>
+              <a:rPr sz="2000" b="0" i="0">
+                <a:solidFill>
+                  <a:srgbClr val="242A33"/>
+                </a:solidFill>
+                <a:latin typeface="Segoe UI"/>
+                <a:ea typeface="微软雅黑"/>
+              </a:rPr>
+              <a:t>：</a:t>
+            </a:r>
+            <a:r>
+              <a:rPr sz="1879" b="0" i="0">
+                <a:solidFill>
+                  <a:srgbClr val="242A33"/>
+                </a:solidFill>
+                <a:latin typeface="Consolas"/>
+                <a:ea typeface="Consolas"/>
+              </a:rPr>
+              <a:t>ADD 8 -1 1</a:t>
+            </a:r>
+            <a:r>
+              <a:rPr sz="2000" b="0" i="0">
+                <a:solidFill>
+                  <a:srgbClr val="242A33"/>
+                </a:solidFill>
+                <a:latin typeface="Segoe UI"/>
+                <a:ea typeface="微软雅黑"/>
+              </a:rPr>
+              <a:t> 有进位，但结果 0 完全正确</a:t>
+            </a:r>
+          </a:p>
+          <a:p>
+            <a:pPr algn="l">
+              <a:lnSpc>
+                <a:spcPct val="132000"/>
+              </a:lnSpc>
+              <a:spcBef>
+                <a:spcPts val="0"/>
+              </a:spcBef>
+              <a:spcAft>
+                <a:spcPts val="1240"/>
+              </a:spcAft>
+            </a:pPr>
+            <a:r>
+              <a:rPr sz="2000" b="0" i="0">
+                <a:solidFill>
+                  <a:srgbClr val="242A33"/>
+                </a:solidFill>
+                <a:latin typeface="Segoe UI"/>
+                <a:ea typeface="微软雅黑"/>
+              </a:rPr>
+              <a:t>•  </a:t>
+            </a:r>
+            <a:r>
+              <a:rPr sz="2000" b="1" i="0">
+                <a:solidFill>
+                  <a:srgbClr val="12395B"/>
+                </a:solidFill>
+                <a:latin typeface="Segoe UI"/>
+                <a:ea typeface="微软雅黑"/>
+              </a:rPr>
+              <a:t>评分</a:t>
+            </a:r>
+            <a:r>
+              <a:rPr sz="2000" b="0" i="0">
+                <a:solidFill>
+                  <a:srgbClr val="242A33"/>
+                </a:solidFill>
+                <a:latin typeface="Segoe UI"/>
+                <a:ea typeface="微软雅黑"/>
+              </a:rPr>
+              <a:t>：两个方向的转换 8 分 + n 位回绕 6 分 + 溢出判定 6 分</a:t>
+            </a:r>
+          </a:p>
+        </p:txBody>
+      </p:sp>
+      <p:sp>
+        <p:nvSpPr>
+          <p:cNvPr id="5" name="TextBox 4"/>
+          <p:cNvSpPr txBox="1"/>
+          <p:nvPr/>
+        </p:nvSpPr>
+        <p:spPr>
+          <a:xfrm>
+            <a:off x="566928" y="6327648"/>
+            <a:ext cx="8229600" cy="310896"/>
+          </a:xfrm>
+          <a:prstGeom prst="rect">
+            <a:avLst/>
+          </a:prstGeom>
+          <a:noFill/>
+        </p:spPr>
+        <p:txBody>
+          <a:bodyPr wrap="square" lIns="0" rIns="0" tIns="0" bIns="0">
+            <a:noAutofit/>
+          </a:bodyPr>
+          <a:lstStyle/>
+          <a:p>
+            <a:pPr algn="l">
+              <a:spcBef>
+                <a:spcPts val="0"/>
+              </a:spcBef>
+              <a:spcAft>
+                <a:spcPts val="0"/>
+              </a:spcAft>
+            </a:pPr>
+            <a:r>
+              <a:rPr sz="1000" b="0" i="0">
+                <a:solidFill>
+                  <a:srgbClr val="6B7582"/>
+                </a:solidFill>
+                <a:latin typeface="Segoe UI"/>
+                <a:ea typeface="微软雅黑"/>
+              </a:rPr>
+              <a:t>计算概论（B） · 第5周 · 闫宏飞 · 2026 Fall</a:t>
+            </a:r>
+          </a:p>
+        </p:txBody>
+      </p:sp>
+      <p:sp>
+        <p:nvSpPr>
+          <p:cNvPr id="6" name="TextBox 5"/>
+          <p:cNvSpPr txBox="1"/>
+          <p:nvPr/>
+        </p:nvSpPr>
+        <p:spPr>
+          <a:xfrm>
+            <a:off x="10710367" y="6327648"/>
+            <a:ext cx="914400" cy="310896"/>
+          </a:xfrm>
+          <a:prstGeom prst="rect">
+            <a:avLst/>
+          </a:prstGeom>
+          <a:noFill/>
+        </p:spPr>
+        <p:txBody>
+          <a:bodyPr wrap="square" lIns="0" rIns="0" tIns="0" bIns="0">
+            <a:noAutofit/>
+          </a:bodyPr>
+          <a:lstStyle/>
+          <a:p>
+            <a:pPr algn="r">
+              <a:spcBef>
+                <a:spcPts val="0"/>
+              </a:spcBef>
+              <a:spcAft>
+                <a:spcPts val="0"/>
+              </a:spcAft>
+            </a:pPr>
+            <a:r>
+              <a:rPr sz="1000" b="0" i="0">
+                <a:solidFill>
+                  <a:srgbClr val="6B7582"/>
+                </a:solidFill>
+                <a:latin typeface="Segoe UI"/>
+                <a:ea typeface="微软雅黑"/>
+              </a:rPr>
+              <a:t>18</a:t>
+            </a:r>
+          </a:p>
+        </p:txBody>
+      </p:sp>
+    </p:spTree>
+  </p:cSld>
+  <p:clrMapOvr>
+    <a:masterClrMapping/>
+  </p:clrMapOvr>
+</p:sld>
+</file>
+
+<file path=ppt/slides/slide19.xml><?xml version="1.0" encoding="utf-8"?>
 <p:sld xmlns:a="http://schemas.openxmlformats.org/drawingml/2006/main" xmlns:p="http://schemas.openxmlformats.org/presentationml/2006/main" xmlns:r="http://schemas.openxmlformats.org/officeDocument/2006/relationships">
   <p:cSld>
     <p:spTree>
@@ -7017,7 +8687,332 @@
 </p:sld>
 </file>
 
-<file path=ppt/slides/slide17.xml><?xml version="1.0" encoding="utf-8"?>
+<file path=ppt/slides/slide2.xml><?xml version="1.0" encoding="utf-8"?>
+<p:sld xmlns:a="http://schemas.openxmlformats.org/drawingml/2006/main" xmlns:p="http://schemas.openxmlformats.org/presentationml/2006/main" xmlns:r="http://schemas.openxmlformats.org/officeDocument/2006/relationships">
+  <p:cSld>
+    <p:spTree>
+      <p:nvGrpSpPr>
+        <p:cNvPr id="1" name=""/>
+        <p:cNvGrpSpPr/>
+        <p:nvPr/>
+      </p:nvGrpSpPr>
+      <p:grpSpPr/>
+      <p:sp>
+        <p:nvSpPr>
+          <p:cNvPr id="2" name="TextBox 1"/>
+          <p:cNvSpPr txBox="1"/>
+          <p:nvPr/>
+        </p:nvSpPr>
+        <p:spPr>
+          <a:xfrm>
+            <a:off x="566928" y="420624"/>
+            <a:ext cx="11057839" cy="548640"/>
+          </a:xfrm>
+          <a:prstGeom prst="rect">
+            <a:avLst/>
+          </a:prstGeom>
+          <a:noFill/>
+        </p:spPr>
+        <p:txBody>
+          <a:bodyPr wrap="square" lIns="0" rIns="0" tIns="0" bIns="0">
+            <a:noAutofit/>
+          </a:bodyPr>
+          <a:lstStyle/>
+          <a:p>
+            <a:pPr algn="l">
+              <a:spcBef>
+                <a:spcPts val="0"/>
+              </a:spcBef>
+              <a:spcAft>
+                <a:spcPts val="0"/>
+              </a:spcAft>
+            </a:pPr>
+            <a:r>
+              <a:rPr sz="2600" b="1" i="0">
+                <a:solidFill>
+                  <a:srgbClr val="12395B"/>
+                </a:solidFill>
+                <a:latin typeface="Segoe UI"/>
+                <a:ea typeface="微软雅黑"/>
+              </a:rPr>
+              <a:t>月考不是筛人，是体检</a:t>
+            </a:r>
+          </a:p>
+        </p:txBody>
+      </p:sp>
+      <p:sp>
+        <p:nvSpPr>
+          <p:cNvPr id="3" name="Rectangle 2"/>
+          <p:cNvSpPr/>
+          <p:nvPr/>
+        </p:nvSpPr>
+        <p:spPr>
+          <a:xfrm>
+            <a:off x="566928" y="1060704"/>
+            <a:ext cx="960120" cy="40640"/>
+          </a:xfrm>
+          <a:prstGeom prst="rect">
+            <a:avLst/>
+          </a:prstGeom>
+          <a:solidFill>
+            <a:srgbClr val="E07B39"/>
+          </a:solidFill>
+          <a:ln>
+            <a:noFill/>
+          </a:ln>
+          <a:effectLst/>
+        </p:spPr>
+        <p:style>
+          <a:lnRef idx="1">
+            <a:schemeClr val="accent1"/>
+          </a:lnRef>
+          <a:fillRef idx="3">
+            <a:schemeClr val="accent1"/>
+          </a:fillRef>
+          <a:effectRef idx="2">
+            <a:schemeClr val="accent1"/>
+          </a:effectRef>
+          <a:fontRef idx="minor">
+            <a:schemeClr val="lt1"/>
+          </a:fontRef>
+        </p:style>
+        <p:txBody>
+          <a:bodyPr rtlCol="0" anchor="ctr"/>
+          <a:lstStyle/>
+          <a:p>
+            <a:pPr algn="ctr"/>
+          </a:p>
+        </p:txBody>
+      </p:sp>
+      <p:sp>
+        <p:nvSpPr>
+          <p:cNvPr id="4" name="Rectangle 3"/>
+          <p:cNvSpPr/>
+          <p:nvPr/>
+        </p:nvSpPr>
+        <p:spPr>
+          <a:xfrm>
+            <a:off x="566928" y="2084831"/>
+            <a:ext cx="11057839" cy="2286000"/>
+          </a:xfrm>
+          <a:prstGeom prst="rect">
+            <a:avLst/>
+          </a:prstGeom>
+          <a:solidFill>
+            <a:srgbClr val="F2F4F7"/>
+          </a:solidFill>
+          <a:ln>
+            <a:noFill/>
+          </a:ln>
+          <a:effectLst/>
+        </p:spPr>
+        <p:style>
+          <a:lnRef idx="1">
+            <a:schemeClr val="accent1"/>
+          </a:lnRef>
+          <a:fillRef idx="3">
+            <a:schemeClr val="accent1"/>
+          </a:fillRef>
+          <a:effectRef idx="2">
+            <a:schemeClr val="accent1"/>
+          </a:effectRef>
+          <a:fontRef idx="minor">
+            <a:schemeClr val="lt1"/>
+          </a:fontRef>
+        </p:style>
+        <p:txBody>
+          <a:bodyPr rtlCol="0" anchor="ctr"/>
+          <a:lstStyle/>
+          <a:p>
+            <a:pPr algn="ctr"/>
+          </a:p>
+        </p:txBody>
+      </p:sp>
+      <p:sp>
+        <p:nvSpPr>
+          <p:cNvPr id="5" name="Rectangle 4"/>
+          <p:cNvSpPr/>
+          <p:nvPr/>
+        </p:nvSpPr>
+        <p:spPr>
+          <a:xfrm>
+            <a:off x="566928" y="2084831"/>
+            <a:ext cx="82296" cy="2286000"/>
+          </a:xfrm>
+          <a:prstGeom prst="rect">
+            <a:avLst/>
+          </a:prstGeom>
+          <a:solidFill>
+            <a:srgbClr val="E07B39"/>
+          </a:solidFill>
+          <a:ln>
+            <a:noFill/>
+          </a:ln>
+          <a:effectLst/>
+        </p:spPr>
+        <p:style>
+          <a:lnRef idx="1">
+            <a:schemeClr val="accent1"/>
+          </a:lnRef>
+          <a:fillRef idx="3">
+            <a:schemeClr val="accent1"/>
+          </a:fillRef>
+          <a:effectRef idx="2">
+            <a:schemeClr val="accent1"/>
+          </a:effectRef>
+          <a:fontRef idx="minor">
+            <a:schemeClr val="lt1"/>
+          </a:fontRef>
+        </p:style>
+        <p:txBody>
+          <a:bodyPr rtlCol="0" anchor="ctr"/>
+          <a:lstStyle/>
+          <a:p>
+            <a:pPr algn="ctr"/>
+          </a:p>
+        </p:txBody>
+      </p:sp>
+      <p:sp>
+        <p:nvSpPr>
+          <p:cNvPr id="6" name="TextBox 5"/>
+          <p:cNvSpPr txBox="1"/>
+          <p:nvPr/>
+        </p:nvSpPr>
+        <p:spPr>
+          <a:xfrm>
+            <a:off x="1069848" y="2377440"/>
+            <a:ext cx="10051999" cy="1737360"/>
+          </a:xfrm>
+          <a:prstGeom prst="rect">
+            <a:avLst/>
+          </a:prstGeom>
+          <a:noFill/>
+        </p:spPr>
+        <p:txBody>
+          <a:bodyPr wrap="square" lIns="0" rIns="0" tIns="0" bIns="0">
+            <a:noAutofit/>
+          </a:bodyPr>
+          <a:lstStyle/>
+          <a:p>
+            <a:pPr algn="l">
+              <a:lnSpc>
+                <a:spcPct val="145000"/>
+              </a:lnSpc>
+              <a:spcBef>
+                <a:spcPts val="0"/>
+              </a:spcBef>
+              <a:spcAft>
+                <a:spcPts val="0"/>
+              </a:spcAft>
+            </a:pPr>
+            <a:r>
+              <a:rPr sz="2600" b="1" i="0">
+                <a:solidFill>
+                  <a:srgbClr val="12395B"/>
+                </a:solidFill>
+                <a:latin typeface="Segoe UI"/>
+                <a:ea typeface="微软雅黑"/>
+              </a:rPr>
+              <a:t>在 11 月的核心内容开始之前，把语法关、速度关、调试关三处短板暴露出来。</a:t>
+            </a:r>
+          </a:p>
+        </p:txBody>
+      </p:sp>
+      <p:sp>
+        <p:nvSpPr>
+          <p:cNvPr id="7" name="TextBox 6"/>
+          <p:cNvSpPr txBox="1"/>
+          <p:nvPr/>
+        </p:nvSpPr>
+        <p:spPr>
+          <a:xfrm>
+            <a:off x="566928" y="6327648"/>
+            <a:ext cx="8229600" cy="310896"/>
+          </a:xfrm>
+          <a:prstGeom prst="rect">
+            <a:avLst/>
+          </a:prstGeom>
+          <a:noFill/>
+        </p:spPr>
+        <p:txBody>
+          <a:bodyPr wrap="square" lIns="0" rIns="0" tIns="0" bIns="0">
+            <a:noAutofit/>
+          </a:bodyPr>
+          <a:lstStyle/>
+          <a:p>
+            <a:pPr algn="l">
+              <a:spcBef>
+                <a:spcPts val="0"/>
+              </a:spcBef>
+              <a:spcAft>
+                <a:spcPts val="0"/>
+              </a:spcAft>
+            </a:pPr>
+            <a:r>
+              <a:rPr sz="1000" b="0" i="0">
+                <a:solidFill>
+                  <a:srgbClr val="6B7582"/>
+                </a:solidFill>
+                <a:latin typeface="Segoe UI"/>
+                <a:ea typeface="微软雅黑"/>
+              </a:rPr>
+              <a:t>计算概论（B） · 第5周 · 闫宏飞 · 2026 Fall</a:t>
+            </a:r>
+          </a:p>
+        </p:txBody>
+      </p:sp>
+      <p:sp>
+        <p:nvSpPr>
+          <p:cNvPr id="8" name="TextBox 7"/>
+          <p:cNvSpPr txBox="1"/>
+          <p:nvPr/>
+        </p:nvSpPr>
+        <p:spPr>
+          <a:xfrm>
+            <a:off x="10710367" y="6327648"/>
+            <a:ext cx="914400" cy="310896"/>
+          </a:xfrm>
+          <a:prstGeom prst="rect">
+            <a:avLst/>
+          </a:prstGeom>
+          <a:noFill/>
+        </p:spPr>
+        <p:txBody>
+          <a:bodyPr wrap="square" lIns="0" rIns="0" tIns="0" bIns="0">
+            <a:noAutofit/>
+          </a:bodyPr>
+          <a:lstStyle/>
+          <a:p>
+            <a:pPr algn="r">
+              <a:spcBef>
+                <a:spcPts val="0"/>
+              </a:spcBef>
+              <a:spcAft>
+                <a:spcPts val="0"/>
+              </a:spcAft>
+            </a:pPr>
+            <a:r>
+              <a:rPr sz="1000" b="0" i="0">
+                <a:solidFill>
+                  <a:srgbClr val="6B7582"/>
+                </a:solidFill>
+                <a:latin typeface="Segoe UI"/>
+                <a:ea typeface="微软雅黑"/>
+              </a:rPr>
+              <a:t>2</a:t>
+            </a:r>
+          </a:p>
+        </p:txBody>
+      </p:sp>
+    </p:spTree>
+  </p:cSld>
+  <p:clrMapOvr>
+    <a:masterClrMapping/>
+  </p:clrMapOvr>
+</p:sld>
+</file>
+
+<file path=ppt/slides/slide20.xml><?xml version="1.0" encoding="utf-8"?>
 <p:sld xmlns:a="http://schemas.openxmlformats.org/drawingml/2006/main" xmlns:p="http://schemas.openxmlformats.org/presentationml/2006/main" xmlns:r="http://schemas.openxmlformats.org/officeDocument/2006/relationships">
   <p:cSld>
     <p:spTree>
@@ -7638,7 +9633,7 @@
                 <a:latin typeface="Segoe UI"/>
                 <a:ea typeface="微软雅黑"/>
               </a:rPr>
-              <a:t>17</a:t>
+              <a:t>20</a:t>
             </a:r>
           </a:p>
         </p:txBody>
@@ -7651,7 +9646,7 @@
 </p:sld>
 </file>
 
-<file path=ppt/slides/slide18.xml><?xml version="1.0" encoding="utf-8"?>
+<file path=ppt/slides/slide21.xml><?xml version="1.0" encoding="utf-8"?>
 <p:sld xmlns:a="http://schemas.openxmlformats.org/drawingml/2006/main" xmlns:p="http://schemas.openxmlformats.org/presentationml/2006/main" xmlns:r="http://schemas.openxmlformats.org/officeDocument/2006/relationships">
   <p:cSld>
     <p:spTree>
@@ -7963,7 +9958,7 @@
                 <a:latin typeface="Segoe UI"/>
                 <a:ea typeface="微软雅黑"/>
               </a:rPr>
-              <a:t>18</a:t>
+              <a:t>21</a:t>
             </a:r>
           </a:p>
         </p:txBody>
@@ -7976,7 +9971,7 @@
 </p:sld>
 </file>
 
-<file path=ppt/slides/slide19.xml><?xml version="1.0" encoding="utf-8"?>
+<file path=ppt/slides/slide22.xml><?xml version="1.0" encoding="utf-8"?>
 <p:sld xmlns:a="http://schemas.openxmlformats.org/drawingml/2006/main" xmlns:p="http://schemas.openxmlformats.org/presentationml/2006/main" xmlns:r="http://schemas.openxmlformats.org/officeDocument/2006/relationships">
   <p:cSld>
     <p:spTree>
@@ -8848,7 +10843,7 @@
                 <a:latin typeface="Segoe UI"/>
                 <a:ea typeface="微软雅黑"/>
               </a:rPr>
-              <a:t>19</a:t>
+              <a:t>22</a:t>
             </a:r>
           </a:p>
         </p:txBody>
@@ -8861,7 +10856,7 @@
 </p:sld>
 </file>
 
-<file path=ppt/slides/slide2.xml><?xml version="1.0" encoding="utf-8"?>
+<file path=ppt/slides/slide23.xml><?xml version="1.0" encoding="utf-8"?>
 <p:sld xmlns:a="http://schemas.openxmlformats.org/drawingml/2006/main" xmlns:p="http://schemas.openxmlformats.org/presentationml/2006/main" xmlns:r="http://schemas.openxmlformats.org/officeDocument/2006/relationships">
   <p:cSld>
     <p:spTree>
@@ -8909,7 +10904,7 @@
                 <a:latin typeface="Segoe UI"/>
                 <a:ea typeface="微软雅黑"/>
               </a:rPr>
-              <a:t>月考不是筛人，是体检</a:t>
+              <a:t>112 分钟 / 6 题的时间预算</a:t>
             </a:r>
           </a:p>
         </p:txBody>
@@ -8960,102 +10955,14 @@
       </p:sp>
       <p:sp>
         <p:nvSpPr>
-          <p:cNvPr id="4" name="Rectangle 3"/>
-          <p:cNvSpPr/>
+          <p:cNvPr id="4" name="TextBox 3"/>
+          <p:cNvSpPr txBox="1"/>
           <p:nvPr/>
         </p:nvSpPr>
         <p:spPr>
           <a:xfrm>
-            <a:off x="566928" y="2084831"/>
-            <a:ext cx="11057839" cy="2286000"/>
-          </a:xfrm>
-          <a:prstGeom prst="rect">
-            <a:avLst/>
-          </a:prstGeom>
-          <a:solidFill>
-            <a:srgbClr val="F2F4F7"/>
-          </a:solidFill>
-          <a:ln>
-            <a:noFill/>
-          </a:ln>
-          <a:effectLst/>
-        </p:spPr>
-        <p:style>
-          <a:lnRef idx="1">
-            <a:schemeClr val="accent1"/>
-          </a:lnRef>
-          <a:fillRef idx="3">
-            <a:schemeClr val="accent1"/>
-          </a:fillRef>
-          <a:effectRef idx="2">
-            <a:schemeClr val="accent1"/>
-          </a:effectRef>
-          <a:fontRef idx="minor">
-            <a:schemeClr val="lt1"/>
-          </a:fontRef>
-        </p:style>
-        <p:txBody>
-          <a:bodyPr rtlCol="0" anchor="ctr"/>
-          <a:lstStyle/>
-          <a:p>
-            <a:pPr algn="ctr"/>
-          </a:p>
-        </p:txBody>
-      </p:sp>
-      <p:sp>
-        <p:nvSpPr>
-          <p:cNvPr id="5" name="Rectangle 4"/>
-          <p:cNvSpPr/>
-          <p:nvPr/>
-        </p:nvSpPr>
-        <p:spPr>
-          <a:xfrm>
-            <a:off x="566928" y="2084831"/>
-            <a:ext cx="82296" cy="2286000"/>
-          </a:xfrm>
-          <a:prstGeom prst="rect">
-            <a:avLst/>
-          </a:prstGeom>
-          <a:solidFill>
-            <a:srgbClr val="E07B39"/>
-          </a:solidFill>
-          <a:ln>
-            <a:noFill/>
-          </a:ln>
-          <a:effectLst/>
-        </p:spPr>
-        <p:style>
-          <a:lnRef idx="1">
-            <a:schemeClr val="accent1"/>
-          </a:lnRef>
-          <a:fillRef idx="3">
-            <a:schemeClr val="accent1"/>
-          </a:fillRef>
-          <a:effectRef idx="2">
-            <a:schemeClr val="accent1"/>
-          </a:effectRef>
-          <a:fontRef idx="minor">
-            <a:schemeClr val="lt1"/>
-          </a:fontRef>
-        </p:style>
-        <p:txBody>
-          <a:bodyPr rtlCol="0" anchor="ctr"/>
-          <a:lstStyle/>
-          <a:p>
-            <a:pPr algn="ctr"/>
-          </a:p>
-        </p:txBody>
-      </p:sp>
-      <p:sp>
-        <p:nvSpPr>
-          <p:cNvPr id="6" name="TextBox 5"/>
-          <p:cNvSpPr txBox="1"/>
-          <p:nvPr/>
-        </p:nvSpPr>
-        <p:spPr>
-          <a:xfrm>
-            <a:off x="1069848" y="2377440"/>
-            <a:ext cx="10051999" cy="1737360"/>
+            <a:off x="566928" y="2748407"/>
+            <a:ext cx="11057839" cy="1964690"/>
           </a:xfrm>
           <a:prstGeom prst="rect">
             <a:avLst/>
@@ -9070,7 +10977,7 @@
           <a:p>
             <a:pPr algn="l">
               <a:lnSpc>
-                <a:spcPct val="145000"/>
+                <a:spcPts val="2210"/>
               </a:lnSpc>
               <a:spcBef>
                 <a:spcPts val="0"/>
@@ -9080,21 +10987,159 @@
               </a:spcAft>
             </a:pPr>
             <a:r>
-              <a:rPr sz="2600" b="1" i="0">
+              <a:rPr sz="1700" b="0" i="0">
                 <a:solidFill>
                   <a:srgbClr val="12395B"/>
                 </a:solidFill>
-                <a:latin typeface="Segoe UI"/>
-                <a:ea typeface="微软雅黑"/>
-              </a:rPr>
-              <a:t>在 11 月的核心内容开始之前，把语法关、速度关、调试关三处短板暴露出来。</a:t>
-            </a:r>
-          </a:p>
-        </p:txBody>
-      </p:sp>
-      <p:sp>
-        <p:nvSpPr>
-          <p:cNvPr id="7" name="TextBox 6"/>
+                <a:latin typeface="Consolas"/>
+                <a:ea typeface="Consolas"/>
+              </a:rPr>
+              <a:t> </a:t>
+            </a:r>
+          </a:p>
+          <a:p>
+            <a:pPr algn="l">
+              <a:lnSpc>
+                <a:spcPts val="2210"/>
+              </a:lnSpc>
+              <a:spcBef>
+                <a:spcPts val="0"/>
+              </a:spcBef>
+              <a:spcAft>
+                <a:spcPts val="0"/>
+              </a:spcAft>
+            </a:pPr>
+            <a:r>
+              <a:rPr sz="1700" b="0" i="0">
+                <a:solidFill>
+                  <a:srgbClr val="12395B"/>
+                </a:solidFill>
+                <a:latin typeface="Consolas"/>
+                <a:ea typeface="Consolas"/>
+              </a:rPr>
+              <a:t>   0-5 min      通读 6 题，按预估难度排序，先做有把握的</a:t>
+            </a:r>
+          </a:p>
+          <a:p>
+            <a:pPr algn="l">
+              <a:lnSpc>
+                <a:spcPts val="2210"/>
+              </a:lnSpc>
+              <a:spcBef>
+                <a:spcPts val="0"/>
+              </a:spcBef>
+              <a:spcAft>
+                <a:spcPts val="0"/>
+              </a:spcAft>
+            </a:pPr>
+            <a:r>
+              <a:rPr sz="1700" b="0" i="0">
+                <a:solidFill>
+                  <a:srgbClr val="12395B"/>
+                </a:solidFill>
+                <a:latin typeface="Consolas"/>
+                <a:ea typeface="Consolas"/>
+              </a:rPr>
+              <a:t>   5-15 min     T1（签到）—— 写完就交，用 OJ 反馈代替自己检查</a:t>
+            </a:r>
+          </a:p>
+          <a:p>
+            <a:pPr algn="l">
+              <a:lnSpc>
+                <a:spcPts val="2210"/>
+              </a:lnSpc>
+              <a:spcBef>
+                <a:spcPts val="0"/>
+              </a:spcBef>
+              <a:spcAft>
+                <a:spcPts val="0"/>
+              </a:spcAft>
+            </a:pPr>
+            <a:r>
+              <a:rPr sz="1700" b="0" i="0">
+                <a:solidFill>
+                  <a:srgbClr val="12395B"/>
+                </a:solidFill>
+                <a:latin typeface="Consolas"/>
+                <a:ea typeface="Consolas"/>
+              </a:rPr>
+              <a:t>   15-40 min    T2、T3</a:t>
+            </a:r>
+          </a:p>
+          <a:p>
+            <a:pPr algn="l">
+              <a:lnSpc>
+                <a:spcPts val="2210"/>
+              </a:lnSpc>
+              <a:spcBef>
+                <a:spcPts val="0"/>
+              </a:spcBef>
+              <a:spcAft>
+                <a:spcPts val="0"/>
+              </a:spcAft>
+            </a:pPr>
+            <a:r>
+              <a:rPr sz="1700" b="0" i="0">
+                <a:solidFill>
+                  <a:srgbClr val="12395B"/>
+                </a:solidFill>
+                <a:latin typeface="Consolas"/>
+                <a:ea typeface="Consolas"/>
+              </a:rPr>
+              <a:t>   40-70 min    T4</a:t>
+            </a:r>
+          </a:p>
+          <a:p>
+            <a:pPr algn="l">
+              <a:lnSpc>
+                <a:spcPts val="2210"/>
+              </a:lnSpc>
+              <a:spcBef>
+                <a:spcPts val="0"/>
+              </a:spcBef>
+              <a:spcAft>
+                <a:spcPts val="0"/>
+              </a:spcAft>
+            </a:pPr>
+            <a:r>
+              <a:rPr sz="1700" b="0" i="0">
+                <a:solidFill>
+                  <a:srgbClr val="12395B"/>
+                </a:solidFill>
+                <a:latin typeface="Consolas"/>
+                <a:ea typeface="Consolas"/>
+              </a:rPr>
+              <a:t>   70-102 min   T5、T6 —— 做不完就保一题，别两头都断</a:t>
+            </a:r>
+          </a:p>
+          <a:p>
+            <a:pPr algn="l">
+              <a:lnSpc>
+                <a:spcPts val="2210"/>
+              </a:lnSpc>
+              <a:spcBef>
+                <a:spcPts val="0"/>
+              </a:spcBef>
+              <a:spcAft>
+                <a:spcPts val="0"/>
+              </a:spcAft>
+            </a:pPr>
+            <a:r>
+              <a:rPr sz="1700" b="0" i="0">
+                <a:solidFill>
+                  <a:srgbClr val="12395B"/>
+                </a:solidFill>
+                <a:latin typeface="Consolas"/>
+                <a:ea typeface="Consolas"/>
+              </a:rPr>
+              <a:t>   102-112 min  检查输出格式：多余空格、换行、精度</a:t>
+            </a:r>
+          </a:p>
+        </p:txBody>
+      </p:sp>
+      <p:sp>
+        <p:nvSpPr>
+          <p:cNvPr id="5" name="TextBox 4"/>
           <p:cNvSpPr txBox="1"/>
           <p:nvPr/>
         </p:nvSpPr>
@@ -9137,7 +11182,7 @@
       </p:sp>
       <p:sp>
         <p:nvSpPr>
-          <p:cNvPr id="8" name="TextBox 7"/>
+          <p:cNvPr id="6" name="TextBox 5"/>
           <p:cNvSpPr txBox="1"/>
           <p:nvPr/>
         </p:nvSpPr>
@@ -9173,7 +11218,7 @@
                 <a:latin typeface="Segoe UI"/>
                 <a:ea typeface="微软雅黑"/>
               </a:rPr>
-              <a:t>2</a:t>
+              <a:t>23</a:t>
             </a:r>
           </a:p>
         </p:txBody>
@@ -9186,7 +11231,7 @@
 </p:sld>
 </file>
 
-<file path=ppt/slides/slide20.xml><?xml version="1.0" encoding="utf-8"?>
+<file path=ppt/slides/slide24.xml><?xml version="1.0" encoding="utf-8"?>
 <p:sld xmlns:a="http://schemas.openxmlformats.org/drawingml/2006/main" xmlns:p="http://schemas.openxmlformats.org/presentationml/2006/main" xmlns:r="http://schemas.openxmlformats.org/officeDocument/2006/relationships">
   <p:cSld>
     <p:spTree>
@@ -9645,7 +11690,7 @@
                 <a:latin typeface="Segoe UI"/>
                 <a:ea typeface="微软雅黑"/>
               </a:rPr>
-              <a:t>20</a:t>
+              <a:t>24</a:t>
             </a:r>
           </a:p>
         </p:txBody>
@@ -9658,7 +11703,7 @@
 </p:sld>
 </file>
 
-<file path=ppt/slides/slide21.xml><?xml version="1.0" encoding="utf-8"?>
+<file path=ppt/slides/slide25.xml><?xml version="1.0" encoding="utf-8"?>
 <p:sld xmlns:a="http://schemas.openxmlformats.org/drawingml/2006/main" xmlns:p="http://schemas.openxmlformats.org/presentationml/2006/main" xmlns:r="http://schemas.openxmlformats.org/officeDocument/2006/relationships">
   <p:cSld>
     <p:spTree>
@@ -10695,7 +12740,7 @@
                 <a:latin typeface="Segoe UI"/>
                 <a:ea typeface="微软雅黑"/>
               </a:rPr>
-              <a:t>21</a:t>
+              <a:t>25</a:t>
             </a:r>
           </a:p>
         </p:txBody>
@@ -10708,7 +12753,7 @@
 </p:sld>
 </file>
 
-<file path=ppt/slides/slide22.xml><?xml version="1.0" encoding="utf-8"?>
+<file path=ppt/slides/slide26.xml><?xml version="1.0" encoding="utf-8"?>
 <p:sld xmlns:a="http://schemas.openxmlformats.org/drawingml/2006/main" xmlns:p="http://schemas.openxmlformats.org/presentationml/2006/main" xmlns:r="http://schemas.openxmlformats.org/officeDocument/2006/relationships">
   <p:cSld>
     <p:spTree>
@@ -11025,7 +13070,7 @@
                           <a:latin typeface="Segoe UI"/>
                           <a:ea typeface="微软雅黑"/>
                         </a:rPr>
-                        <a:t>机房，5 题</a:t>
+                        <a:t>机房，112 分钟，6 题</a:t>
                       </a:r>
                     </a:p>
                   </a:txBody>
@@ -11537,7 +13582,7 @@
                 <a:latin typeface="Segoe UI"/>
                 <a:ea typeface="微软雅黑"/>
               </a:rPr>
-              <a:t>22</a:t>
+              <a:t>26</a:t>
             </a:r>
           </a:p>
         </p:txBody>
@@ -11550,7 +13595,7 @@
 </p:sld>
 </file>
 
-<file path=ppt/slides/slide23.xml><?xml version="1.0" encoding="utf-8"?>
+<file path=ppt/slides/slide27.xml><?xml version="1.0" encoding="utf-8"?>
 <p:sld xmlns:a="http://schemas.openxmlformats.org/drawingml/2006/main" xmlns:p="http://schemas.openxmlformats.org/presentationml/2006/main" xmlns:r="http://schemas.openxmlformats.org/officeDocument/2006/relationships">
   <p:cSld>
     <p:spTree>
@@ -11764,7 +13809,40 @@
                 <a:latin typeface="Segoe UI"/>
                 <a:ea typeface="微软雅黑"/>
               </a:rPr>
-              <a:t>签到 → 字符串 → 字典排序 → 复杂度意识 → 综合模拟</a:t>
+              <a:t>签到 → 字符串 → 字典排序 → 复杂度意识 → 综合模拟 → 补码位运算</a:t>
+            </a:r>
+          </a:p>
+          <a:p>
+            <a:pPr algn="l">
+              <a:lnSpc>
+                <a:spcPct val="132000"/>
+              </a:lnSpc>
+              <a:spcBef>
+                <a:spcPts val="0"/>
+              </a:spcBef>
+              <a:spcAft>
+                <a:spcPts val="1240"/>
+              </a:spcAft>
+            </a:pPr>
+            <a:r>
+              <a:rPr sz="2000" b="0" i="0">
+                <a:solidFill>
+                  <a:srgbClr val="242A33"/>
+                </a:solidFill>
+                <a:latin typeface="Segoe UI"/>
+                <a:ea typeface="微软雅黑"/>
+              </a:rPr>
+              <a:t>•  规格与期末机考一致：</a:t>
+            </a:r>
+            <a:r>
+              <a:rPr sz="2000" b="1" i="0">
+                <a:solidFill>
+                  <a:srgbClr val="12395B"/>
+                </a:solidFill>
+                <a:latin typeface="Segoe UI"/>
+                <a:ea typeface="微软雅黑"/>
+              </a:rPr>
+              <a:t>6 题 / 112 分钟 / 100 分</a:t>
             </a:r>
           </a:p>
           <a:p>
@@ -11906,7 +13984,7 @@
                 <a:latin typeface="Segoe UI"/>
                 <a:ea typeface="微软雅黑"/>
               </a:rPr>
-              <a:t>23</a:t>
+              <a:t>27</a:t>
             </a:r>
           </a:p>
         </p:txBody>
@@ -11919,7 +13997,7 @@
 </p:sld>
 </file>
 
-<file path=ppt/slides/slide24.xml><?xml version="1.0" encoding="utf-8"?>
+<file path=ppt/slides/slide28.xml><?xml version="1.0" encoding="utf-8"?>
 <p:sld xmlns:a="http://schemas.openxmlformats.org/drawingml/2006/main" xmlns:p="http://schemas.openxmlformats.org/presentationml/2006/main" xmlns:r="http://schemas.openxmlformats.org/officeDocument/2006/relationships">
   <p:cSld>
     <p:spTree>
@@ -12231,7 +14309,7 @@
                 <a:latin typeface="Segoe UI"/>
                 <a:ea typeface="微软雅黑"/>
               </a:rPr>
-              <a:t>24</a:t>
+              <a:t>28</a:t>
             </a:r>
           </a:p>
         </p:txBody>
@@ -12492,7 +14570,7 @@
                           <a:latin typeface="Segoe UI"/>
                           <a:ea typeface="微软雅黑"/>
                         </a:rPr>
-                        <a:t>机房（安排以通知为准）；约 2 小时</a:t>
+                        <a:t>机房（安排以通知为准）；112 分钟</a:t>
                       </a:r>
                     </a:p>
                   </a:txBody>
@@ -12562,7 +14640,7 @@
                           <a:latin typeface="Segoe UI"/>
                           <a:ea typeface="微软雅黑"/>
                         </a:rPr>
-                        <a:t>5 题；OpenJudge（cs101 小组）</a:t>
+                        <a:t>6 题；OpenJudge（cs101 小组）</a:t>
                       </a:r>
                     </a:p>
                   </a:txBody>
@@ -15687,7 +17765,7 @@
                 <a:latin typeface="Segoe UI"/>
                 <a:ea typeface="微软雅黑"/>
               </a:rPr>
-              <a:t>月考样卷（5 题 / 100 分）</a:t>
+              <a:t>月考样卷（6 题 / 100 分）</a:t>
             </a:r>
           </a:p>
         </p:txBody>
@@ -15748,7 +17826,7 @@
                 <a:latin typeface="Segoe UI"/>
                 <a:ea typeface="微软雅黑"/>
               </a:rPr>
-              <a:t>难度梯度</a:t>
+              <a:t>与期末机考同一规格</a:t>
             </a:r>
           </a:p>
         </p:txBody>
@@ -15799,14 +17877,102 @@
       </p:sp>
       <p:sp>
         <p:nvSpPr>
-          <p:cNvPr id="4" name="TextBox 3"/>
+          <p:cNvPr id="4" name="Rectangle 3"/>
+          <p:cNvSpPr/>
+          <p:nvPr/>
+        </p:nvSpPr>
+        <p:spPr>
+          <a:xfrm>
+            <a:off x="566928" y="2084831"/>
+            <a:ext cx="11057839" cy="2286000"/>
+          </a:xfrm>
+          <a:prstGeom prst="rect">
+            <a:avLst/>
+          </a:prstGeom>
+          <a:solidFill>
+            <a:srgbClr val="F2F4F7"/>
+          </a:solidFill>
+          <a:ln>
+            <a:noFill/>
+          </a:ln>
+          <a:effectLst/>
+        </p:spPr>
+        <p:style>
+          <a:lnRef idx="1">
+            <a:schemeClr val="accent1"/>
+          </a:lnRef>
+          <a:fillRef idx="3">
+            <a:schemeClr val="accent1"/>
+          </a:fillRef>
+          <a:effectRef idx="2">
+            <a:schemeClr val="accent1"/>
+          </a:effectRef>
+          <a:fontRef idx="minor">
+            <a:schemeClr val="lt1"/>
+          </a:fontRef>
+        </p:style>
+        <p:txBody>
+          <a:bodyPr rtlCol="0" anchor="ctr"/>
+          <a:lstStyle/>
+          <a:p>
+            <a:pPr algn="ctr"/>
+          </a:p>
+        </p:txBody>
+      </p:sp>
+      <p:sp>
+        <p:nvSpPr>
+          <p:cNvPr id="5" name="Rectangle 4"/>
+          <p:cNvSpPr/>
+          <p:nvPr/>
+        </p:nvSpPr>
+        <p:spPr>
+          <a:xfrm>
+            <a:off x="566928" y="2084831"/>
+            <a:ext cx="82296" cy="2286000"/>
+          </a:xfrm>
+          <a:prstGeom prst="rect">
+            <a:avLst/>
+          </a:prstGeom>
+          <a:solidFill>
+            <a:srgbClr val="E07B39"/>
+          </a:solidFill>
+          <a:ln>
+            <a:noFill/>
+          </a:ln>
+          <a:effectLst/>
+        </p:spPr>
+        <p:style>
+          <a:lnRef idx="1">
+            <a:schemeClr val="accent1"/>
+          </a:lnRef>
+          <a:fillRef idx="3">
+            <a:schemeClr val="accent1"/>
+          </a:fillRef>
+          <a:effectRef idx="2">
+            <a:schemeClr val="accent1"/>
+          </a:effectRef>
+          <a:fontRef idx="minor">
+            <a:schemeClr val="lt1"/>
+          </a:fontRef>
+        </p:style>
+        <p:txBody>
+          <a:bodyPr rtlCol="0" anchor="ctr"/>
+          <a:lstStyle/>
+          <a:p>
+            <a:pPr algn="ctr"/>
+          </a:p>
+        </p:txBody>
+      </p:sp>
+      <p:sp>
+        <p:nvSpPr>
+          <p:cNvPr id="6" name="TextBox 5"/>
           <p:cNvSpPr txBox="1"/>
           <p:nvPr/>
         </p:nvSpPr>
         <p:spPr>
           <a:xfrm>
-            <a:off x="566928" y="2888742"/>
-            <a:ext cx="11057839" cy="1684020"/>
+            <a:off x="1069848" y="2377440"/>
+            <a:ext cx="10051999" cy="1737360"/>
           </a:xfrm>
           <a:prstGeom prst="rect">
             <a:avLst/>
@@ -15821,7 +17987,7 @@
           <a:p>
             <a:pPr algn="l">
               <a:lnSpc>
-                <a:spcPts val="2210"/>
+                <a:spcPct val="145000"/>
               </a:lnSpc>
               <a:spcBef>
                 <a:spcPts val="0"/>
@@ -15831,136 +17997,21 @@
               </a:spcAft>
             </a:pPr>
             <a:r>
-              <a:rPr sz="1700" b="0" i="0">
+              <a:rPr sz="1800" b="1" i="0">
                 <a:solidFill>
                   <a:srgbClr val="12395B"/>
                 </a:solidFill>
-                <a:latin typeface="Consolas"/>
-                <a:ea typeface="Consolas"/>
-              </a:rPr>
-              <a:t> </a:t>
-            </a:r>
-          </a:p>
-          <a:p>
-            <a:pPr algn="l">
-              <a:lnSpc>
-                <a:spcPts val="2210"/>
-              </a:lnSpc>
-              <a:spcBef>
-                <a:spcPts val="0"/>
-              </a:spcBef>
-              <a:spcAft>
-                <a:spcPts val="0"/>
-              </a:spcAft>
-            </a:pPr>
-            <a:r>
-              <a:rPr sz="1700" b="0" i="0">
-                <a:solidFill>
-                  <a:srgbClr val="12395B"/>
-                </a:solidFill>
-                <a:latin typeface="Consolas"/>
-                <a:ea typeface="Consolas"/>
-              </a:rPr>
-              <a:t>   T1  15分  *          签到：读入与格式化输出        -- 95% 应 AC</a:t>
-            </a:r>
-          </a:p>
-          <a:p>
-            <a:pPr algn="l">
-              <a:lnSpc>
-                <a:spcPts val="2210"/>
-              </a:lnSpc>
-              <a:spcBef>
-                <a:spcPts val="0"/>
-              </a:spcBef>
-              <a:spcAft>
-                <a:spcPts val="0"/>
-              </a:spcAft>
-            </a:pPr>
-            <a:r>
-              <a:rPr sz="1700" b="0" i="0">
-                <a:solidFill>
-                  <a:srgbClr val="12395B"/>
-                </a:solidFill>
-                <a:latin typeface="Consolas"/>
-                <a:ea typeface="Consolas"/>
-              </a:rPr>
-              <a:t>   T2  20分  **         字符串处理                    -- 75% AC</a:t>
-            </a:r>
-          </a:p>
-          <a:p>
-            <a:pPr algn="l">
-              <a:lnSpc>
-                <a:spcPts val="2210"/>
-              </a:lnSpc>
-              <a:spcBef>
-                <a:spcPts val="0"/>
-              </a:spcBef>
-              <a:spcAft>
-                <a:spcPts val="0"/>
-              </a:spcAft>
-            </a:pPr>
-            <a:r>
-              <a:rPr sz="1700" b="0" i="0">
-                <a:solidFill>
-                  <a:srgbClr val="12395B"/>
-                </a:solidFill>
-                <a:latin typeface="Consolas"/>
-                <a:ea typeface="Consolas"/>
-              </a:rPr>
-              <a:t>   T3  20分  ***        字典 / 排序 + 多关键字         -- 55% AC</a:t>
-            </a:r>
-          </a:p>
-          <a:p>
-            <a:pPr algn="l">
-              <a:lnSpc>
-                <a:spcPts val="2210"/>
-              </a:lnSpc>
-              <a:spcBef>
-                <a:spcPts val="0"/>
-              </a:spcBef>
-              <a:spcAft>
-                <a:spcPts val="0"/>
-              </a:spcAft>
-            </a:pPr>
-            <a:r>
-              <a:rPr sz="1700" b="0" i="0">
-                <a:solidFill>
-                  <a:srgbClr val="12395B"/>
-                </a:solidFill>
-                <a:latin typeface="Consolas"/>
-                <a:ea typeface="Consolas"/>
-              </a:rPr>
-              <a:t>   T4  20分  ***        复杂度意识：必须用筛或前缀和   -- 45% AC</a:t>
-            </a:r>
-          </a:p>
-          <a:p>
-            <a:pPr algn="l">
-              <a:lnSpc>
-                <a:spcPts val="2210"/>
-              </a:lnSpc>
-              <a:spcBef>
-                <a:spcPts val="0"/>
-              </a:spcBef>
-              <a:spcAft>
-                <a:spcPts val="0"/>
-              </a:spcAft>
-            </a:pPr>
-            <a:r>
-              <a:rPr sz="1700" b="0" i="0">
-                <a:solidFill>
-                  <a:srgbClr val="12395B"/>
-                </a:solidFill>
-                <a:latin typeface="Consolas"/>
-                <a:ea typeface="Consolas"/>
-              </a:rPr>
-              <a:t>   T5  25分  ****       综合模拟，边界多              -- 25% AC</a:t>
-            </a:r>
-          </a:p>
-        </p:txBody>
-      </p:sp>
-      <p:sp>
-        <p:nvSpPr>
-          <p:cNvPr id="5" name="TextBox 4"/>
+                <a:latin typeface="Segoe UI"/>
+                <a:ea typeface="微软雅黑"/>
+              </a:rPr>
+              <a:t>三次月考与期末上机考试都是 6 题 / 112 分钟 / 100 分，分值一律 15+15+15+15+20+20。月考不是缩水版，是同构演练。</a:t>
+            </a:r>
+          </a:p>
+        </p:txBody>
+      </p:sp>
+      <p:sp>
+        <p:nvSpPr>
+          <p:cNvPr id="7" name="TextBox 6"/>
           <p:cNvSpPr txBox="1"/>
           <p:nvPr/>
         </p:nvSpPr>
@@ -16003,7 +18054,7 @@
       </p:sp>
       <p:sp>
         <p:nvSpPr>
-          <p:cNvPr id="6" name="TextBox 5"/>
+          <p:cNvPr id="8" name="TextBox 7"/>
           <p:cNvSpPr txBox="1"/>
           <p:nvPr/>
         </p:nvSpPr>

--- a/courseware/202609_ADS_W05_October_Exam_Review.pptx
+++ b/courseware/202609_ADS_W05_October_Exam_Review.pptx
@@ -8230,7 +8230,17 @@
                 <a:latin typeface="Segoe UI"/>
                 <a:ea typeface="微软雅黑"/>
               </a:rPr>
-              <a:t>负数不能用 `bin(x)`</a:t>
+              <a:t>负数不能用 </a:t>
+            </a:r>
+            <a:r>
+              <a:rPr sz="1879" b="1" i="0">
+                <a:solidFill>
+                  <a:srgbClr val="12395B"/>
+                </a:solidFill>
+                <a:latin typeface="Consolas"/>
+                <a:ea typeface="Consolas"/>
+              </a:rPr>
+              <a:t>bin(x)</a:t>
             </a:r>
             <a:r>
               <a:rPr sz="2000" b="0" i="0">
@@ -8296,6 +8306,16 @@
               <a:t>•  </a:t>
             </a:r>
             <a:r>
+              <a:rPr sz="1879" b="1" i="0">
+                <a:solidFill>
+                  <a:srgbClr val="12395B"/>
+                </a:solidFill>
+                <a:latin typeface="Consolas"/>
+                <a:ea typeface="Consolas"/>
+              </a:rPr>
+              <a:t>FROM</a:t>
+            </a:r>
+            <a:r>
               <a:rPr sz="2000" b="1" i="0">
                 <a:solidFill>
                   <a:srgbClr val="12395B"/>
@@ -8303,7 +8323,7 @@
                 <a:latin typeface="Segoe UI"/>
                 <a:ea typeface="微软雅黑"/>
               </a:rPr>
-              <a:t>`FROM` 忘了减 2^n</a:t>
+              <a:t> 忘了减 2^n</a:t>
             </a:r>
             <a:r>
               <a:rPr sz="2000" b="0" i="0">

--- a/courseware/202609_ADS_W05_October_Exam_Review.pptx
+++ b/courseware/202609_ADS_W05_October_Exam_Review.pptx
@@ -3498,7 +3498,7 @@
                 <a:latin typeface="Consolas"/>
                 <a:ea typeface="Consolas"/>
               </a:rPr>
-              <a:t>   T1  15分  *          签到：读入与格式化输出        -- 95% 应 AC</a:t>
+              <a:t>   T1   *          签到：读入与格式化输出        -- 95% 应 AC</a:t>
             </a:r>
           </a:p>
           <a:p>
@@ -3521,7 +3521,7 @@
                 <a:latin typeface="Consolas"/>
                 <a:ea typeface="Consolas"/>
               </a:rPr>
-              <a:t>   T2  15分  **         字符串处理                    -- 75% AC</a:t>
+              <a:t>   T2   **         字符串处理                    -- 75% AC</a:t>
             </a:r>
           </a:p>
           <a:p>
@@ -3544,7 +3544,7 @@
                 <a:latin typeface="Consolas"/>
                 <a:ea typeface="Consolas"/>
               </a:rPr>
-              <a:t>   T3  15分  ***        字典 / 排序 + 多关键字         -- 55% AC</a:t>
+              <a:t>   T3   ***        字典 / 排序 + 多关键字        -- 55% AC</a:t>
             </a:r>
           </a:p>
           <a:p>
@@ -3567,7 +3567,7 @@
                 <a:latin typeface="Consolas"/>
                 <a:ea typeface="Consolas"/>
               </a:rPr>
-              <a:t>   T4  15分  ***        复杂度意识：必须用筛或前缀和   -- 45% AC</a:t>
+              <a:t>   T4   ***        复杂度意识：必须用筛或前缀和  -- 45% AC</a:t>
             </a:r>
           </a:p>
           <a:p>
@@ -3590,7 +3590,7 @@
                 <a:latin typeface="Consolas"/>
                 <a:ea typeface="Consolas"/>
               </a:rPr>
-              <a:t>   T5  20分  ****       综合模拟，边界多              -- 25% AC</a:t>
+              <a:t>   T5   ****       综合模拟，边界多              -- 25% AC</a:t>
             </a:r>
           </a:p>
           <a:p>
@@ -3613,7 +3613,7 @@
                 <a:latin typeface="Consolas"/>
                 <a:ea typeface="Consolas"/>
               </a:rPr>
-              <a:t>   T6  20分  ****       补码 / 位运算，符号边界密集   -- 20% AC</a:t>
+              <a:t>   T6   ****       补码 / 位运算，符号边界密集   -- 20% AC</a:t>
             </a:r>
           </a:p>
         </p:txBody>

--- a/courseware/202609_ADS_W05_October_Exam_Review.pptx
+++ b/courseware/202609_ADS_W05_October_Exam_Review.pptx
@@ -3434,16 +3434,1010 @@
           </a:p>
         </p:txBody>
       </p:sp>
-      <p:sp>
-        <p:nvSpPr>
-          <p:cNvPr id="4" name="TextBox 3"/>
+      <p:graphicFrame>
+        <p:nvGraphicFramePr>
+          <p:cNvPr id="4" name="Table 3"/>
+          <p:cNvGraphicFramePr>
+            <a:graphicFrameLocks noGrp="1"/>
+          </p:cNvGraphicFramePr>
+          <p:nvPr/>
+        </p:nvGraphicFramePr>
+        <p:xfrm>
+          <a:off x="566928" y="1298448"/>
+          <a:ext cx="11057836" cy="3075940"/>
+        </p:xfrm>
+        <a:graphic>
+          <a:graphicData uri="http://schemas.openxmlformats.org/drawingml/2006/table">
+            <a:tbl>
+              <a:tblPr firstRow="1" bandRow="1">
+                <a:tableStyleId>{5C22544A-7EE6-4342-B048-85BDC9FD1C3A}</a:tableStyleId>
+              </a:tblPr>
+              <a:tblGrid>
+                <a:gridCol w="1701205"/>
+                <a:gridCol w="1701205"/>
+                <a:gridCol w="1701205"/>
+                <a:gridCol w="5954221"/>
+              </a:tblGrid>
+              <a:tr h="439420">
+                <a:tc>
+                  <a:txBody>
+                    <a:bodyPr wrap="square"/>
+                    <a:lstStyle/>
+                    <a:p>
+                      <a:pPr algn="l">
+                        <a:lnSpc>
+                          <a:spcPct val="122000"/>
+                        </a:lnSpc>
+                        <a:spcBef>
+                          <a:spcPts val="0"/>
+                        </a:spcBef>
+                        <a:spcAft>
+                          <a:spcPts val="0"/>
+                        </a:spcAft>
+                      </a:pPr>
+                      <a:r>
+                        <a:rPr sz="1700" b="1" i="0">
+                          <a:solidFill>
+                            <a:srgbClr val="FFFFFF"/>
+                          </a:solidFill>
+                          <a:latin typeface="Segoe UI"/>
+                          <a:ea typeface="微软雅黑"/>
+                        </a:rPr>
+                        <a:t>题号</a:t>
+                      </a:r>
+                    </a:p>
+                  </a:txBody>
+                  <a:tcPr marL="100584" marR="100584" marT="27432" marB="27432" anchor="ctr">
+                    <a:solidFill>
+                      <a:srgbClr val="12395B"/>
+                    </a:solidFill>
+                  </a:tcPr>
+                </a:tc>
+                <a:tc>
+                  <a:txBody>
+                    <a:bodyPr wrap="square"/>
+                    <a:lstStyle/>
+                    <a:p>
+                      <a:pPr algn="l">
+                        <a:lnSpc>
+                          <a:spcPct val="122000"/>
+                        </a:lnSpc>
+                        <a:spcBef>
+                          <a:spcPts val="0"/>
+                        </a:spcBef>
+                        <a:spcAft>
+                          <a:spcPts val="0"/>
+                        </a:spcAft>
+                      </a:pPr>
+                      <a:r>
+                        <a:rPr sz="1700" b="1" i="0">
+                          <a:solidFill>
+                            <a:srgbClr val="FFFFFF"/>
+                          </a:solidFill>
+                          <a:latin typeface="Segoe UI"/>
+                          <a:ea typeface="微软雅黑"/>
+                        </a:rPr>
+                        <a:t>难度</a:t>
+                      </a:r>
+                    </a:p>
+                  </a:txBody>
+                  <a:tcPr marL="100584" marR="100584" marT="27432" marB="27432" anchor="ctr">
+                    <a:solidFill>
+                      <a:srgbClr val="12395B"/>
+                    </a:solidFill>
+                  </a:tcPr>
+                </a:tc>
+                <a:tc>
+                  <a:txBody>
+                    <a:bodyPr wrap="square"/>
+                    <a:lstStyle/>
+                    <a:p>
+                      <a:pPr algn="l">
+                        <a:lnSpc>
+                          <a:spcPct val="122000"/>
+                        </a:lnSpc>
+                        <a:spcBef>
+                          <a:spcPts val="0"/>
+                        </a:spcBef>
+                        <a:spcAft>
+                          <a:spcPts val="0"/>
+                        </a:spcAft>
+                      </a:pPr>
+                      <a:r>
+                        <a:rPr sz="1700" b="1" i="0">
+                          <a:solidFill>
+                            <a:srgbClr val="FFFFFF"/>
+                          </a:solidFill>
+                          <a:latin typeface="Segoe UI"/>
+                          <a:ea typeface="微软雅黑"/>
+                        </a:rPr>
+                        <a:t>预期 AC</a:t>
+                      </a:r>
+                    </a:p>
+                  </a:txBody>
+                  <a:tcPr marL="100584" marR="100584" marT="27432" marB="27432" anchor="ctr">
+                    <a:solidFill>
+                      <a:srgbClr val="12395B"/>
+                    </a:solidFill>
+                  </a:tcPr>
+                </a:tc>
+                <a:tc>
+                  <a:txBody>
+                    <a:bodyPr wrap="square"/>
+                    <a:lstStyle/>
+                    <a:p>
+                      <a:pPr algn="l">
+                        <a:lnSpc>
+                          <a:spcPct val="122000"/>
+                        </a:lnSpc>
+                        <a:spcBef>
+                          <a:spcPts val="0"/>
+                        </a:spcBef>
+                        <a:spcAft>
+                          <a:spcPts val="0"/>
+                        </a:spcAft>
+                      </a:pPr>
+                      <a:r>
+                        <a:rPr sz="1700" b="1" i="0">
+                          <a:solidFill>
+                            <a:srgbClr val="FFFFFF"/>
+                          </a:solidFill>
+                          <a:latin typeface="Segoe UI"/>
+                          <a:ea typeface="微软雅黑"/>
+                        </a:rPr>
+                        <a:t>考点</a:t>
+                      </a:r>
+                    </a:p>
+                  </a:txBody>
+                  <a:tcPr marL="100584" marR="100584" marT="27432" marB="27432" anchor="ctr">
+                    <a:solidFill>
+                      <a:srgbClr val="12395B"/>
+                    </a:solidFill>
+                  </a:tcPr>
+                </a:tc>
+              </a:tr>
+              <a:tr h="439420">
+                <a:tc>
+                  <a:txBody>
+                    <a:bodyPr wrap="square"/>
+                    <a:lstStyle/>
+                    <a:p>
+                      <a:pPr algn="l">
+                        <a:lnSpc>
+                          <a:spcPct val="122000"/>
+                        </a:lnSpc>
+                        <a:spcBef>
+                          <a:spcPts val="0"/>
+                        </a:spcBef>
+                        <a:spcAft>
+                          <a:spcPts val="0"/>
+                        </a:spcAft>
+                      </a:pPr>
+                      <a:r>
+                        <a:rPr sz="1700" b="0" i="0">
+                          <a:solidFill>
+                            <a:srgbClr val="242A33"/>
+                          </a:solidFill>
+                          <a:latin typeface="Segoe UI"/>
+                          <a:ea typeface="微软雅黑"/>
+                        </a:rPr>
+                        <a:t>T1</a:t>
+                      </a:r>
+                    </a:p>
+                  </a:txBody>
+                  <a:tcPr marL="100584" marR="100584" marT="27432" marB="27432" anchor="ctr">
+                    <a:solidFill>
+                      <a:srgbClr val="FFFFFF"/>
+                    </a:solidFill>
+                  </a:tcPr>
+                </a:tc>
+                <a:tc>
+                  <a:txBody>
+                    <a:bodyPr wrap="square"/>
+                    <a:lstStyle/>
+                    <a:p>
+                      <a:pPr algn="l">
+                        <a:lnSpc>
+                          <a:spcPct val="122000"/>
+                        </a:lnSpc>
+                        <a:spcBef>
+                          <a:spcPts val="0"/>
+                        </a:spcBef>
+                        <a:spcAft>
+                          <a:spcPts val="0"/>
+                        </a:spcAft>
+                      </a:pPr>
+                      <a:r>
+                        <a:rPr sz="1700" b="0" i="0">
+                          <a:solidFill>
+                            <a:srgbClr val="242A33"/>
+                          </a:solidFill>
+                          <a:latin typeface="Segoe UI"/>
+                          <a:ea typeface="微软雅黑"/>
+                        </a:rPr>
+                        <a:t>★☆☆☆☆</a:t>
+                      </a:r>
+                    </a:p>
+                  </a:txBody>
+                  <a:tcPr marL="100584" marR="100584" marT="27432" marB="27432" anchor="ctr">
+                    <a:solidFill>
+                      <a:srgbClr val="FFFFFF"/>
+                    </a:solidFill>
+                  </a:tcPr>
+                </a:tc>
+                <a:tc>
+                  <a:txBody>
+                    <a:bodyPr wrap="square"/>
+                    <a:lstStyle/>
+                    <a:p>
+                      <a:pPr algn="l">
+                        <a:lnSpc>
+                          <a:spcPct val="122000"/>
+                        </a:lnSpc>
+                        <a:spcBef>
+                          <a:spcPts val="0"/>
+                        </a:spcBef>
+                        <a:spcAft>
+                          <a:spcPts val="0"/>
+                        </a:spcAft>
+                      </a:pPr>
+                      <a:r>
+                        <a:rPr sz="1700" b="0" i="0">
+                          <a:solidFill>
+                            <a:srgbClr val="242A33"/>
+                          </a:solidFill>
+                          <a:latin typeface="Segoe UI"/>
+                          <a:ea typeface="微软雅黑"/>
+                        </a:rPr>
+                        <a:t>95%</a:t>
+                      </a:r>
+                    </a:p>
+                  </a:txBody>
+                  <a:tcPr marL="100584" marR="100584" marT="27432" marB="27432" anchor="ctr">
+                    <a:solidFill>
+                      <a:srgbClr val="FFFFFF"/>
+                    </a:solidFill>
+                  </a:tcPr>
+                </a:tc>
+                <a:tc>
+                  <a:txBody>
+                    <a:bodyPr wrap="square"/>
+                    <a:lstStyle/>
+                    <a:p>
+                      <a:pPr algn="l">
+                        <a:lnSpc>
+                          <a:spcPct val="122000"/>
+                        </a:lnSpc>
+                        <a:spcBef>
+                          <a:spcPts val="0"/>
+                        </a:spcBef>
+                        <a:spcAft>
+                          <a:spcPts val="0"/>
+                        </a:spcAft>
+                      </a:pPr>
+                      <a:r>
+                        <a:rPr sz="1700" b="0" i="0">
+                          <a:solidFill>
+                            <a:srgbClr val="242A33"/>
+                          </a:solidFill>
+                          <a:latin typeface="Segoe UI"/>
+                          <a:ea typeface="微软雅黑"/>
+                        </a:rPr>
+                        <a:t>签到：读入与格式化输出</a:t>
+                      </a:r>
+                    </a:p>
+                  </a:txBody>
+                  <a:tcPr marL="100584" marR="100584" marT="27432" marB="27432" anchor="ctr">
+                    <a:solidFill>
+                      <a:srgbClr val="FFFFFF"/>
+                    </a:solidFill>
+                  </a:tcPr>
+                </a:tc>
+              </a:tr>
+              <a:tr h="439420">
+                <a:tc>
+                  <a:txBody>
+                    <a:bodyPr wrap="square"/>
+                    <a:lstStyle/>
+                    <a:p>
+                      <a:pPr algn="l">
+                        <a:lnSpc>
+                          <a:spcPct val="122000"/>
+                        </a:lnSpc>
+                        <a:spcBef>
+                          <a:spcPts val="0"/>
+                        </a:spcBef>
+                        <a:spcAft>
+                          <a:spcPts val="0"/>
+                        </a:spcAft>
+                      </a:pPr>
+                      <a:r>
+                        <a:rPr sz="1700" b="0" i="0">
+                          <a:solidFill>
+                            <a:srgbClr val="242A33"/>
+                          </a:solidFill>
+                          <a:latin typeface="Segoe UI"/>
+                          <a:ea typeface="微软雅黑"/>
+                        </a:rPr>
+                        <a:t>T2</a:t>
+                      </a:r>
+                    </a:p>
+                  </a:txBody>
+                  <a:tcPr marL="100584" marR="100584" marT="27432" marB="27432" anchor="ctr">
+                    <a:solidFill>
+                      <a:srgbClr val="F2F4F7"/>
+                    </a:solidFill>
+                  </a:tcPr>
+                </a:tc>
+                <a:tc>
+                  <a:txBody>
+                    <a:bodyPr wrap="square"/>
+                    <a:lstStyle/>
+                    <a:p>
+                      <a:pPr algn="l">
+                        <a:lnSpc>
+                          <a:spcPct val="122000"/>
+                        </a:lnSpc>
+                        <a:spcBef>
+                          <a:spcPts val="0"/>
+                        </a:spcBef>
+                        <a:spcAft>
+                          <a:spcPts val="0"/>
+                        </a:spcAft>
+                      </a:pPr>
+                      <a:r>
+                        <a:rPr sz="1700" b="0" i="0">
+                          <a:solidFill>
+                            <a:srgbClr val="242A33"/>
+                          </a:solidFill>
+                          <a:latin typeface="Segoe UI"/>
+                          <a:ea typeface="微软雅黑"/>
+                        </a:rPr>
+                        <a:t>★★☆☆☆</a:t>
+                      </a:r>
+                    </a:p>
+                  </a:txBody>
+                  <a:tcPr marL="100584" marR="100584" marT="27432" marB="27432" anchor="ctr">
+                    <a:solidFill>
+                      <a:srgbClr val="F2F4F7"/>
+                    </a:solidFill>
+                  </a:tcPr>
+                </a:tc>
+                <a:tc>
+                  <a:txBody>
+                    <a:bodyPr wrap="square"/>
+                    <a:lstStyle/>
+                    <a:p>
+                      <a:pPr algn="l">
+                        <a:lnSpc>
+                          <a:spcPct val="122000"/>
+                        </a:lnSpc>
+                        <a:spcBef>
+                          <a:spcPts val="0"/>
+                        </a:spcBef>
+                        <a:spcAft>
+                          <a:spcPts val="0"/>
+                        </a:spcAft>
+                      </a:pPr>
+                      <a:r>
+                        <a:rPr sz="1700" b="0" i="0">
+                          <a:solidFill>
+                            <a:srgbClr val="242A33"/>
+                          </a:solidFill>
+                          <a:latin typeface="Segoe UI"/>
+                          <a:ea typeface="微软雅黑"/>
+                        </a:rPr>
+                        <a:t>75%</a:t>
+                      </a:r>
+                    </a:p>
+                  </a:txBody>
+                  <a:tcPr marL="100584" marR="100584" marT="27432" marB="27432" anchor="ctr">
+                    <a:solidFill>
+                      <a:srgbClr val="F2F4F7"/>
+                    </a:solidFill>
+                  </a:tcPr>
+                </a:tc>
+                <a:tc>
+                  <a:txBody>
+                    <a:bodyPr wrap="square"/>
+                    <a:lstStyle/>
+                    <a:p>
+                      <a:pPr algn="l">
+                        <a:lnSpc>
+                          <a:spcPct val="122000"/>
+                        </a:lnSpc>
+                        <a:spcBef>
+                          <a:spcPts val="0"/>
+                        </a:spcBef>
+                        <a:spcAft>
+                          <a:spcPts val="0"/>
+                        </a:spcAft>
+                      </a:pPr>
+                      <a:r>
+                        <a:rPr sz="1700" b="0" i="0">
+                          <a:solidFill>
+                            <a:srgbClr val="242A33"/>
+                          </a:solidFill>
+                          <a:latin typeface="Segoe UI"/>
+                          <a:ea typeface="微软雅黑"/>
+                        </a:rPr>
+                        <a:t>字符串处理</a:t>
+                      </a:r>
+                    </a:p>
+                  </a:txBody>
+                  <a:tcPr marL="100584" marR="100584" marT="27432" marB="27432" anchor="ctr">
+                    <a:solidFill>
+                      <a:srgbClr val="F2F4F7"/>
+                    </a:solidFill>
+                  </a:tcPr>
+                </a:tc>
+              </a:tr>
+              <a:tr h="439420">
+                <a:tc>
+                  <a:txBody>
+                    <a:bodyPr wrap="square"/>
+                    <a:lstStyle/>
+                    <a:p>
+                      <a:pPr algn="l">
+                        <a:lnSpc>
+                          <a:spcPct val="122000"/>
+                        </a:lnSpc>
+                        <a:spcBef>
+                          <a:spcPts val="0"/>
+                        </a:spcBef>
+                        <a:spcAft>
+                          <a:spcPts val="0"/>
+                        </a:spcAft>
+                      </a:pPr>
+                      <a:r>
+                        <a:rPr sz="1700" b="0" i="0">
+                          <a:solidFill>
+                            <a:srgbClr val="242A33"/>
+                          </a:solidFill>
+                          <a:latin typeface="Segoe UI"/>
+                          <a:ea typeface="微软雅黑"/>
+                        </a:rPr>
+                        <a:t>T3</a:t>
+                      </a:r>
+                    </a:p>
+                  </a:txBody>
+                  <a:tcPr marL="100584" marR="100584" marT="27432" marB="27432" anchor="ctr">
+                    <a:solidFill>
+                      <a:srgbClr val="FFFFFF"/>
+                    </a:solidFill>
+                  </a:tcPr>
+                </a:tc>
+                <a:tc>
+                  <a:txBody>
+                    <a:bodyPr wrap="square"/>
+                    <a:lstStyle/>
+                    <a:p>
+                      <a:pPr algn="l">
+                        <a:lnSpc>
+                          <a:spcPct val="122000"/>
+                        </a:lnSpc>
+                        <a:spcBef>
+                          <a:spcPts val="0"/>
+                        </a:spcBef>
+                        <a:spcAft>
+                          <a:spcPts val="0"/>
+                        </a:spcAft>
+                      </a:pPr>
+                      <a:r>
+                        <a:rPr sz="1700" b="0" i="0">
+                          <a:solidFill>
+                            <a:srgbClr val="242A33"/>
+                          </a:solidFill>
+                          <a:latin typeface="Segoe UI"/>
+                          <a:ea typeface="微软雅黑"/>
+                        </a:rPr>
+                        <a:t>★★★☆☆</a:t>
+                      </a:r>
+                    </a:p>
+                  </a:txBody>
+                  <a:tcPr marL="100584" marR="100584" marT="27432" marB="27432" anchor="ctr">
+                    <a:solidFill>
+                      <a:srgbClr val="FFFFFF"/>
+                    </a:solidFill>
+                  </a:tcPr>
+                </a:tc>
+                <a:tc>
+                  <a:txBody>
+                    <a:bodyPr wrap="square"/>
+                    <a:lstStyle/>
+                    <a:p>
+                      <a:pPr algn="l">
+                        <a:lnSpc>
+                          <a:spcPct val="122000"/>
+                        </a:lnSpc>
+                        <a:spcBef>
+                          <a:spcPts val="0"/>
+                        </a:spcBef>
+                        <a:spcAft>
+                          <a:spcPts val="0"/>
+                        </a:spcAft>
+                      </a:pPr>
+                      <a:r>
+                        <a:rPr sz="1700" b="0" i="0">
+                          <a:solidFill>
+                            <a:srgbClr val="242A33"/>
+                          </a:solidFill>
+                          <a:latin typeface="Segoe UI"/>
+                          <a:ea typeface="微软雅黑"/>
+                        </a:rPr>
+                        <a:t>55%</a:t>
+                      </a:r>
+                    </a:p>
+                  </a:txBody>
+                  <a:tcPr marL="100584" marR="100584" marT="27432" marB="27432" anchor="ctr">
+                    <a:solidFill>
+                      <a:srgbClr val="FFFFFF"/>
+                    </a:solidFill>
+                  </a:tcPr>
+                </a:tc>
+                <a:tc>
+                  <a:txBody>
+                    <a:bodyPr wrap="square"/>
+                    <a:lstStyle/>
+                    <a:p>
+                      <a:pPr algn="l">
+                        <a:lnSpc>
+                          <a:spcPct val="122000"/>
+                        </a:lnSpc>
+                        <a:spcBef>
+                          <a:spcPts val="0"/>
+                        </a:spcBef>
+                        <a:spcAft>
+                          <a:spcPts val="0"/>
+                        </a:spcAft>
+                      </a:pPr>
+                      <a:r>
+                        <a:rPr sz="1700" b="0" i="0">
+                          <a:solidFill>
+                            <a:srgbClr val="242A33"/>
+                          </a:solidFill>
+                          <a:latin typeface="Segoe UI"/>
+                          <a:ea typeface="微软雅黑"/>
+                        </a:rPr>
+                        <a:t>字典 / 排序 + 多关键字</a:t>
+                      </a:r>
+                    </a:p>
+                  </a:txBody>
+                  <a:tcPr marL="100584" marR="100584" marT="27432" marB="27432" anchor="ctr">
+                    <a:solidFill>
+                      <a:srgbClr val="FFFFFF"/>
+                    </a:solidFill>
+                  </a:tcPr>
+                </a:tc>
+              </a:tr>
+              <a:tr h="439420">
+                <a:tc>
+                  <a:txBody>
+                    <a:bodyPr wrap="square"/>
+                    <a:lstStyle/>
+                    <a:p>
+                      <a:pPr algn="l">
+                        <a:lnSpc>
+                          <a:spcPct val="122000"/>
+                        </a:lnSpc>
+                        <a:spcBef>
+                          <a:spcPts val="0"/>
+                        </a:spcBef>
+                        <a:spcAft>
+                          <a:spcPts val="0"/>
+                        </a:spcAft>
+                      </a:pPr>
+                      <a:r>
+                        <a:rPr sz="1700" b="0" i="0">
+                          <a:solidFill>
+                            <a:srgbClr val="242A33"/>
+                          </a:solidFill>
+                          <a:latin typeface="Segoe UI"/>
+                          <a:ea typeface="微软雅黑"/>
+                        </a:rPr>
+                        <a:t>T4</a:t>
+                      </a:r>
+                    </a:p>
+                  </a:txBody>
+                  <a:tcPr marL="100584" marR="100584" marT="27432" marB="27432" anchor="ctr">
+                    <a:solidFill>
+                      <a:srgbClr val="F2F4F7"/>
+                    </a:solidFill>
+                  </a:tcPr>
+                </a:tc>
+                <a:tc>
+                  <a:txBody>
+                    <a:bodyPr wrap="square"/>
+                    <a:lstStyle/>
+                    <a:p>
+                      <a:pPr algn="l">
+                        <a:lnSpc>
+                          <a:spcPct val="122000"/>
+                        </a:lnSpc>
+                        <a:spcBef>
+                          <a:spcPts val="0"/>
+                        </a:spcBef>
+                        <a:spcAft>
+                          <a:spcPts val="0"/>
+                        </a:spcAft>
+                      </a:pPr>
+                      <a:r>
+                        <a:rPr sz="1700" b="0" i="0">
+                          <a:solidFill>
+                            <a:srgbClr val="242A33"/>
+                          </a:solidFill>
+                          <a:latin typeface="Segoe UI"/>
+                          <a:ea typeface="微软雅黑"/>
+                        </a:rPr>
+                        <a:t>★★★☆☆</a:t>
+                      </a:r>
+                    </a:p>
+                  </a:txBody>
+                  <a:tcPr marL="100584" marR="100584" marT="27432" marB="27432" anchor="ctr">
+                    <a:solidFill>
+                      <a:srgbClr val="F2F4F7"/>
+                    </a:solidFill>
+                  </a:tcPr>
+                </a:tc>
+                <a:tc>
+                  <a:txBody>
+                    <a:bodyPr wrap="square"/>
+                    <a:lstStyle/>
+                    <a:p>
+                      <a:pPr algn="l">
+                        <a:lnSpc>
+                          <a:spcPct val="122000"/>
+                        </a:lnSpc>
+                        <a:spcBef>
+                          <a:spcPts val="0"/>
+                        </a:spcBef>
+                        <a:spcAft>
+                          <a:spcPts val="0"/>
+                        </a:spcAft>
+                      </a:pPr>
+                      <a:r>
+                        <a:rPr sz="1700" b="0" i="0">
+                          <a:solidFill>
+                            <a:srgbClr val="242A33"/>
+                          </a:solidFill>
+                          <a:latin typeface="Segoe UI"/>
+                          <a:ea typeface="微软雅黑"/>
+                        </a:rPr>
+                        <a:t>45%</a:t>
+                      </a:r>
+                    </a:p>
+                  </a:txBody>
+                  <a:tcPr marL="100584" marR="100584" marT="27432" marB="27432" anchor="ctr">
+                    <a:solidFill>
+                      <a:srgbClr val="F2F4F7"/>
+                    </a:solidFill>
+                  </a:tcPr>
+                </a:tc>
+                <a:tc>
+                  <a:txBody>
+                    <a:bodyPr wrap="square"/>
+                    <a:lstStyle/>
+                    <a:p>
+                      <a:pPr algn="l">
+                        <a:lnSpc>
+                          <a:spcPct val="122000"/>
+                        </a:lnSpc>
+                        <a:spcBef>
+                          <a:spcPts val="0"/>
+                        </a:spcBef>
+                        <a:spcAft>
+                          <a:spcPts val="0"/>
+                        </a:spcAft>
+                      </a:pPr>
+                      <a:r>
+                        <a:rPr sz="1700" b="0" i="0">
+                          <a:solidFill>
+                            <a:srgbClr val="242A33"/>
+                          </a:solidFill>
+                          <a:latin typeface="Segoe UI"/>
+                          <a:ea typeface="微软雅黑"/>
+                        </a:rPr>
+                        <a:t>复杂度意识：必须用筛或前缀和</a:t>
+                      </a:r>
+                    </a:p>
+                  </a:txBody>
+                  <a:tcPr marL="100584" marR="100584" marT="27432" marB="27432" anchor="ctr">
+                    <a:solidFill>
+                      <a:srgbClr val="F2F4F7"/>
+                    </a:solidFill>
+                  </a:tcPr>
+                </a:tc>
+              </a:tr>
+              <a:tr h="439420">
+                <a:tc>
+                  <a:txBody>
+                    <a:bodyPr wrap="square"/>
+                    <a:lstStyle/>
+                    <a:p>
+                      <a:pPr algn="l">
+                        <a:lnSpc>
+                          <a:spcPct val="122000"/>
+                        </a:lnSpc>
+                        <a:spcBef>
+                          <a:spcPts val="0"/>
+                        </a:spcBef>
+                        <a:spcAft>
+                          <a:spcPts val="0"/>
+                        </a:spcAft>
+                      </a:pPr>
+                      <a:r>
+                        <a:rPr sz="1700" b="0" i="0">
+                          <a:solidFill>
+                            <a:srgbClr val="242A33"/>
+                          </a:solidFill>
+                          <a:latin typeface="Segoe UI"/>
+                          <a:ea typeface="微软雅黑"/>
+                        </a:rPr>
+                        <a:t>T5</a:t>
+                      </a:r>
+                    </a:p>
+                  </a:txBody>
+                  <a:tcPr marL="100584" marR="100584" marT="27432" marB="27432" anchor="ctr">
+                    <a:solidFill>
+                      <a:srgbClr val="FFFFFF"/>
+                    </a:solidFill>
+                  </a:tcPr>
+                </a:tc>
+                <a:tc>
+                  <a:txBody>
+                    <a:bodyPr wrap="square"/>
+                    <a:lstStyle/>
+                    <a:p>
+                      <a:pPr algn="l">
+                        <a:lnSpc>
+                          <a:spcPct val="122000"/>
+                        </a:lnSpc>
+                        <a:spcBef>
+                          <a:spcPts val="0"/>
+                        </a:spcBef>
+                        <a:spcAft>
+                          <a:spcPts val="0"/>
+                        </a:spcAft>
+                      </a:pPr>
+                      <a:r>
+                        <a:rPr sz="1700" b="0" i="0">
+                          <a:solidFill>
+                            <a:srgbClr val="242A33"/>
+                          </a:solidFill>
+                          <a:latin typeface="Segoe UI"/>
+                          <a:ea typeface="微软雅黑"/>
+                        </a:rPr>
+                        <a:t>★★★★☆</a:t>
+                      </a:r>
+                    </a:p>
+                  </a:txBody>
+                  <a:tcPr marL="100584" marR="100584" marT="27432" marB="27432" anchor="ctr">
+                    <a:solidFill>
+                      <a:srgbClr val="FFFFFF"/>
+                    </a:solidFill>
+                  </a:tcPr>
+                </a:tc>
+                <a:tc>
+                  <a:txBody>
+                    <a:bodyPr wrap="square"/>
+                    <a:lstStyle/>
+                    <a:p>
+                      <a:pPr algn="l">
+                        <a:lnSpc>
+                          <a:spcPct val="122000"/>
+                        </a:lnSpc>
+                        <a:spcBef>
+                          <a:spcPts val="0"/>
+                        </a:spcBef>
+                        <a:spcAft>
+                          <a:spcPts val="0"/>
+                        </a:spcAft>
+                      </a:pPr>
+                      <a:r>
+                        <a:rPr sz="1700" b="0" i="0">
+                          <a:solidFill>
+                            <a:srgbClr val="242A33"/>
+                          </a:solidFill>
+                          <a:latin typeface="Segoe UI"/>
+                          <a:ea typeface="微软雅黑"/>
+                        </a:rPr>
+                        <a:t>25%</a:t>
+                      </a:r>
+                    </a:p>
+                  </a:txBody>
+                  <a:tcPr marL="100584" marR="100584" marT="27432" marB="27432" anchor="ctr">
+                    <a:solidFill>
+                      <a:srgbClr val="FFFFFF"/>
+                    </a:solidFill>
+                  </a:tcPr>
+                </a:tc>
+                <a:tc>
+                  <a:txBody>
+                    <a:bodyPr wrap="square"/>
+                    <a:lstStyle/>
+                    <a:p>
+                      <a:pPr algn="l">
+                        <a:lnSpc>
+                          <a:spcPct val="122000"/>
+                        </a:lnSpc>
+                        <a:spcBef>
+                          <a:spcPts val="0"/>
+                        </a:spcBef>
+                        <a:spcAft>
+                          <a:spcPts val="0"/>
+                        </a:spcAft>
+                      </a:pPr>
+                      <a:r>
+                        <a:rPr sz="1700" b="0" i="0">
+                          <a:solidFill>
+                            <a:srgbClr val="242A33"/>
+                          </a:solidFill>
+                          <a:latin typeface="Segoe UI"/>
+                          <a:ea typeface="微软雅黑"/>
+                        </a:rPr>
+                        <a:t>综合模拟，边界多</a:t>
+                      </a:r>
+                    </a:p>
+                  </a:txBody>
+                  <a:tcPr marL="100584" marR="100584" marT="27432" marB="27432" anchor="ctr">
+                    <a:solidFill>
+                      <a:srgbClr val="FFFFFF"/>
+                    </a:solidFill>
+                  </a:tcPr>
+                </a:tc>
+              </a:tr>
+              <a:tr h="439420">
+                <a:tc>
+                  <a:txBody>
+                    <a:bodyPr wrap="square"/>
+                    <a:lstStyle/>
+                    <a:p>
+                      <a:pPr algn="l">
+                        <a:lnSpc>
+                          <a:spcPct val="122000"/>
+                        </a:lnSpc>
+                        <a:spcBef>
+                          <a:spcPts val="0"/>
+                        </a:spcBef>
+                        <a:spcAft>
+                          <a:spcPts val="0"/>
+                        </a:spcAft>
+                      </a:pPr>
+                      <a:r>
+                        <a:rPr sz="1700" b="0" i="0">
+                          <a:solidFill>
+                            <a:srgbClr val="242A33"/>
+                          </a:solidFill>
+                          <a:latin typeface="Segoe UI"/>
+                          <a:ea typeface="微软雅黑"/>
+                        </a:rPr>
+                        <a:t>T6</a:t>
+                      </a:r>
+                    </a:p>
+                  </a:txBody>
+                  <a:tcPr marL="100584" marR="100584" marT="27432" marB="27432" anchor="ctr">
+                    <a:solidFill>
+                      <a:srgbClr val="F2F4F7"/>
+                    </a:solidFill>
+                  </a:tcPr>
+                </a:tc>
+                <a:tc>
+                  <a:txBody>
+                    <a:bodyPr wrap="square"/>
+                    <a:lstStyle/>
+                    <a:p>
+                      <a:pPr algn="l">
+                        <a:lnSpc>
+                          <a:spcPct val="122000"/>
+                        </a:lnSpc>
+                        <a:spcBef>
+                          <a:spcPts val="0"/>
+                        </a:spcBef>
+                        <a:spcAft>
+                          <a:spcPts val="0"/>
+                        </a:spcAft>
+                      </a:pPr>
+                      <a:r>
+                        <a:rPr sz="1700" b="0" i="0">
+                          <a:solidFill>
+                            <a:srgbClr val="242A33"/>
+                          </a:solidFill>
+                          <a:latin typeface="Segoe UI"/>
+                          <a:ea typeface="微软雅黑"/>
+                        </a:rPr>
+                        <a:t>★★★★☆</a:t>
+                      </a:r>
+                    </a:p>
+                  </a:txBody>
+                  <a:tcPr marL="100584" marR="100584" marT="27432" marB="27432" anchor="ctr">
+                    <a:solidFill>
+                      <a:srgbClr val="F2F4F7"/>
+                    </a:solidFill>
+                  </a:tcPr>
+                </a:tc>
+                <a:tc>
+                  <a:txBody>
+                    <a:bodyPr wrap="square"/>
+                    <a:lstStyle/>
+                    <a:p>
+                      <a:pPr algn="l">
+                        <a:lnSpc>
+                          <a:spcPct val="122000"/>
+                        </a:lnSpc>
+                        <a:spcBef>
+                          <a:spcPts val="0"/>
+                        </a:spcBef>
+                        <a:spcAft>
+                          <a:spcPts val="0"/>
+                        </a:spcAft>
+                      </a:pPr>
+                      <a:r>
+                        <a:rPr sz="1700" b="0" i="0">
+                          <a:solidFill>
+                            <a:srgbClr val="242A33"/>
+                          </a:solidFill>
+                          <a:latin typeface="Segoe UI"/>
+                          <a:ea typeface="微软雅黑"/>
+                        </a:rPr>
+                        <a:t>20%</a:t>
+                      </a:r>
+                    </a:p>
+                  </a:txBody>
+                  <a:tcPr marL="100584" marR="100584" marT="27432" marB="27432" anchor="ctr">
+                    <a:solidFill>
+                      <a:srgbClr val="F2F4F7"/>
+                    </a:solidFill>
+                  </a:tcPr>
+                </a:tc>
+                <a:tc>
+                  <a:txBody>
+                    <a:bodyPr wrap="square"/>
+                    <a:lstStyle/>
+                    <a:p>
+                      <a:pPr algn="l">
+                        <a:lnSpc>
+                          <a:spcPct val="122000"/>
+                        </a:lnSpc>
+                        <a:spcBef>
+                          <a:spcPts val="0"/>
+                        </a:spcBef>
+                        <a:spcAft>
+                          <a:spcPts val="0"/>
+                        </a:spcAft>
+                      </a:pPr>
+                      <a:r>
+                        <a:rPr sz="1700" b="0" i="0">
+                          <a:solidFill>
+                            <a:srgbClr val="242A33"/>
+                          </a:solidFill>
+                          <a:latin typeface="Segoe UI"/>
+                          <a:ea typeface="微软雅黑"/>
+                        </a:rPr>
+                        <a:t>补码 / 位运算，符号边界密集</a:t>
+                      </a:r>
+                    </a:p>
+                  </a:txBody>
+                  <a:tcPr marL="100584" marR="100584" marT="27432" marB="27432" anchor="ctr">
+                    <a:solidFill>
+                      <a:srgbClr val="F2F4F7"/>
+                    </a:solidFill>
+                  </a:tcPr>
+                </a:tc>
+              </a:tr>
+            </a:tbl>
+          </a:graphicData>
+        </a:graphic>
+      </p:graphicFrame>
+      <p:sp>
+        <p:nvSpPr>
+          <p:cNvPr id="5" name="TextBox 4"/>
           <p:cNvSpPr txBox="1"/>
           <p:nvPr/>
         </p:nvSpPr>
         <p:spPr>
           <a:xfrm>
-            <a:off x="566928" y="2748407"/>
-            <a:ext cx="11057839" cy="1964690"/>
+            <a:off x="566928" y="4520692"/>
+            <a:ext cx="11057839" cy="329184"/>
           </a:xfrm>
           <a:prstGeom prst="rect">
             <a:avLst/>
@@ -3457,170 +4451,29 @@
           <a:lstStyle/>
           <a:p>
             <a:pPr algn="l">
-              <a:lnSpc>
-                <a:spcPts val="2210"/>
-              </a:lnSpc>
-              <a:spcBef>
-                <a:spcPts val="0"/>
-              </a:spcBef>
-              <a:spcAft>
-                <a:spcPts val="0"/>
-              </a:spcAft>
-            </a:pPr>
-            <a:r>
-              <a:rPr sz="1700" b="0" i="0">
-                <a:solidFill>
-                  <a:srgbClr val="12395B"/>
-                </a:solidFill>
-                <a:latin typeface="Consolas"/>
-                <a:ea typeface="Consolas"/>
-              </a:rPr>
-              <a:t> </a:t>
-            </a:r>
-          </a:p>
-          <a:p>
-            <a:pPr algn="l">
-              <a:lnSpc>
-                <a:spcPts val="2210"/>
-              </a:lnSpc>
-              <a:spcBef>
-                <a:spcPts val="0"/>
-              </a:spcBef>
-              <a:spcAft>
-                <a:spcPts val="0"/>
-              </a:spcAft>
-            </a:pPr>
-            <a:r>
-              <a:rPr sz="1700" b="0" i="0">
-                <a:solidFill>
-                  <a:srgbClr val="12395B"/>
-                </a:solidFill>
-                <a:latin typeface="Consolas"/>
-                <a:ea typeface="Consolas"/>
-              </a:rPr>
-              <a:t>   T1   *          签到：读入与格式化输出        -- 95% 应 AC</a:t>
-            </a:r>
-          </a:p>
-          <a:p>
-            <a:pPr algn="l">
-              <a:lnSpc>
-                <a:spcPts val="2210"/>
-              </a:lnSpc>
-              <a:spcBef>
-                <a:spcPts val="0"/>
-              </a:spcBef>
-              <a:spcAft>
-                <a:spcPts val="0"/>
-              </a:spcAft>
-            </a:pPr>
-            <a:r>
-              <a:rPr sz="1700" b="0" i="0">
-                <a:solidFill>
-                  <a:srgbClr val="12395B"/>
-                </a:solidFill>
-                <a:latin typeface="Consolas"/>
-                <a:ea typeface="Consolas"/>
-              </a:rPr>
-              <a:t>   T2   **         字符串处理                    -- 75% AC</a:t>
-            </a:r>
-          </a:p>
-          <a:p>
-            <a:pPr algn="l">
-              <a:lnSpc>
-                <a:spcPts val="2210"/>
-              </a:lnSpc>
-              <a:spcBef>
-                <a:spcPts val="0"/>
-              </a:spcBef>
-              <a:spcAft>
-                <a:spcPts val="0"/>
-              </a:spcAft>
-            </a:pPr>
-            <a:r>
-              <a:rPr sz="1700" b="0" i="0">
-                <a:solidFill>
-                  <a:srgbClr val="12395B"/>
-                </a:solidFill>
-                <a:latin typeface="Consolas"/>
-                <a:ea typeface="Consolas"/>
-              </a:rPr>
-              <a:t>   T3   ***        字典 / 排序 + 多关键字        -- 55% AC</a:t>
-            </a:r>
-          </a:p>
-          <a:p>
-            <a:pPr algn="l">
-              <a:lnSpc>
-                <a:spcPts val="2210"/>
-              </a:lnSpc>
-              <a:spcBef>
-                <a:spcPts val="0"/>
-              </a:spcBef>
-              <a:spcAft>
-                <a:spcPts val="0"/>
-              </a:spcAft>
-            </a:pPr>
-            <a:r>
-              <a:rPr sz="1700" b="0" i="0">
-                <a:solidFill>
-                  <a:srgbClr val="12395B"/>
-                </a:solidFill>
-                <a:latin typeface="Consolas"/>
-                <a:ea typeface="Consolas"/>
-              </a:rPr>
-              <a:t>   T4   ***        复杂度意识：必须用筛或前缀和  -- 45% AC</a:t>
-            </a:r>
-          </a:p>
-          <a:p>
-            <a:pPr algn="l">
-              <a:lnSpc>
-                <a:spcPts val="2210"/>
-              </a:lnSpc>
-              <a:spcBef>
-                <a:spcPts val="0"/>
-              </a:spcBef>
-              <a:spcAft>
-                <a:spcPts val="0"/>
-              </a:spcAft>
-            </a:pPr>
-            <a:r>
-              <a:rPr sz="1700" b="0" i="0">
-                <a:solidFill>
-                  <a:srgbClr val="12395B"/>
-                </a:solidFill>
-                <a:latin typeface="Consolas"/>
-                <a:ea typeface="Consolas"/>
-              </a:rPr>
-              <a:t>   T5   ****       综合模拟，边界多              -- 25% AC</a:t>
-            </a:r>
-          </a:p>
-          <a:p>
-            <a:pPr algn="l">
-              <a:lnSpc>
-                <a:spcPts val="2210"/>
-              </a:lnSpc>
-              <a:spcBef>
-                <a:spcPts val="0"/>
-              </a:spcBef>
-              <a:spcAft>
-                <a:spcPts val="0"/>
-              </a:spcAft>
-            </a:pPr>
-            <a:r>
-              <a:rPr sz="1700" b="0" i="0">
-                <a:solidFill>
-                  <a:srgbClr val="12395B"/>
-                </a:solidFill>
-                <a:latin typeface="Consolas"/>
-                <a:ea typeface="Consolas"/>
-              </a:rPr>
-              <a:t>   T6   ****       补码 / 位运算，符号边界密集   -- 20% AC</a:t>
-            </a:r>
-          </a:p>
-        </p:txBody>
-      </p:sp>
-      <p:sp>
-        <p:nvSpPr>
-          <p:cNvPr id="5" name="TextBox 4"/>
+              <a:spcBef>
+                <a:spcPts val="0"/>
+              </a:spcBef>
+              <a:spcAft>
+                <a:spcPts val="0"/>
+              </a:spcAft>
+            </a:pPr>
+            <a:r>
+              <a:rPr sz="1300" b="0" i="0">
+                <a:solidFill>
+                  <a:srgbClr val="6B7582"/>
+                </a:solidFill>
+                <a:latin typeface="Segoe UI"/>
+                <a:ea typeface="微软雅黑"/>
+              </a:rPr>
+              <a:t>T1 是全班都应该拿到的签到题；预期 AC 率是命题经验估计，需按实际结果逐年校准</a:t>
+            </a:r>
+          </a:p>
+        </p:txBody>
+      </p:sp>
+      <p:sp>
+        <p:nvSpPr>
+          <p:cNvPr id="6" name="TextBox 5"/>
           <p:cNvSpPr txBox="1"/>
           <p:nvPr/>
         </p:nvSpPr>
@@ -3663,7 +4516,7 @@
       </p:sp>
       <p:sp>
         <p:nvSpPr>
-          <p:cNvPr id="6" name="TextBox 5"/>
+          <p:cNvPr id="7" name="TextBox 6"/>
           <p:cNvSpPr txBox="1"/>
           <p:nvPr/>
         </p:nvSpPr>

--- a/courseware/202609_ADS_W05_October_Exam_Review.pptx
+++ b/courseware/202609_ADS_W05_October_Exam_Review.pptx
@@ -4613,7 +4613,7 @@
                 <a:latin typeface="Segoe UI"/>
                 <a:ea typeface="微软雅黑"/>
               </a:rPr>
-              <a:t>T1 成绩转换（15 分）</a:t>
+              <a:t>T1 成绩转换</a:t>
             </a:r>
           </a:p>
         </p:txBody>
@@ -5467,7 +5467,7 @@
                 <a:latin typeface="Segoe UI"/>
                 <a:ea typeface="微软雅黑"/>
               </a:rPr>
-              <a:t>T2 单词首字母大写（15 分）</a:t>
+              <a:t>T2 单词首字母大写</a:t>
             </a:r>
           </a:p>
         </p:txBody>
@@ -6069,7 +6069,7 @@
                 <a:latin typeface="Segoe UI"/>
                 <a:ea typeface="微软雅黑"/>
               </a:rPr>
-              <a:t>T3 图书借阅排行（15 分）</a:t>
+              <a:t>T3 图书借阅排行</a:t>
             </a:r>
           </a:p>
         </p:txBody>
@@ -6556,7 +6556,7 @@
                 <a:latin typeface="Segoe UI"/>
                 <a:ea typeface="微软雅黑"/>
               </a:rPr>
-              <a:t>T4 区间内的 T-数（15 分）</a:t>
+              <a:t>T4 区间内的 T-数</a:t>
             </a:r>
           </a:p>
         </p:txBody>
@@ -7457,7 +7457,7 @@
                 <a:latin typeface="Segoe UI"/>
                 <a:ea typeface="微软雅黑"/>
               </a:rPr>
-              <a:t>T5 电梯调度模拟（20 分）</a:t>
+              <a:t>T5 电梯调度模拟</a:t>
             </a:r>
           </a:p>
         </p:txBody>
@@ -8128,7 +8128,7 @@
                 <a:latin typeface="Segoe UI"/>
                 <a:ea typeface="微软雅黑"/>
               </a:rPr>
-              <a:t>T6 补码计算器（20 分）</a:t>
+              <a:t>T6 补码计算器</a:t>
             </a:r>
           </a:p>
         </p:txBody>
@@ -18870,14 +18870,14 @@
               </a:spcAft>
             </a:pPr>
             <a:r>
-              <a:rPr sz="1800" b="1" i="0">
+              <a:rPr sz="2200" b="1" i="0">
                 <a:solidFill>
                   <a:srgbClr val="12395B"/>
                 </a:solidFill>
                 <a:latin typeface="Segoe UI"/>
                 <a:ea typeface="微软雅黑"/>
               </a:rPr>
-              <a:t>三次月考与期末上机考试都是 6 题 / 112 分钟 / 100 分，分值一律 15+15+15+15+20+20。月考不是缩水版，是同构演练。</a:t>
+              <a:t>三次月考与期末上机考试都是 6 题 / 112 分钟。月考不是缩水版，是同构演练。</a:t>
             </a:r>
           </a:p>
         </p:txBody>

--- a/courseware/202609_ADS_W05_October_Exam_Review.pptx
+++ b/courseware/202609_ADS_W05_October_Exam_Review.pptx
@@ -14715,7 +14715,7 @@
                 <a:latin typeface="Segoe UI"/>
                 <a:ea typeface="微软雅黑"/>
               </a:rPr>
-              <a:t>6 题 / 112 分钟 / 100 分</a:t>
+              <a:t>6 题 / 112 分钟</a:t>
             </a:r>
           </a:p>
           <a:p>
